--- a/quantum_sudoku_poster_v2.pptx
+++ b/quantum_sudoku_poster_v2.pptx
@@ -1435,7 +1435,38 @@
                   <a:srgbClr val="000000"/>
                 </a:solidFill>
               </a:rPr>
-              <a:t>Derive a QUBO formulation for Sudoku from first principles, validate correctness via simulated annealing, then test on D-Wave’s Leap Hybrid BQM Solver and Advantage2 QPU. Benchmark scalability from 4×4 to 9×9, comparing quantum and classical methods on success rate and energy.</a:t>
+              <a:t>Derive a QUBO formulation for Sudoku from first principles, validate correctness via simulated annealing, then test on D-Wave’s Leap Hybrid BQM Solver and Advantage2 QPU. Benchmark scalability from 4×4 to 9×9, comparing quantum and classical methods on success rate and energy.
+</a:t>
+            </a:r>
+            <a:endParaRPr lang="en-US" sz="2500" dirty="0"/>
+          </a:p>
+          <a:p>
+            <a:pPr algn="l" indent="0" marL="0">
+              <a:buNone/>
+            </a:pPr>
+            <a:r>
+              <a:rPr lang="en-US" sz="2500" b="1" dirty="0">
+                <a:solidFill>
+                  <a:srgbClr val="000000"/>
+                </a:solidFill>
+              </a:rPr>
+              <a:t>
+Hardware Platform
+</a:t>
+            </a:r>
+            <a:endParaRPr lang="en-US" sz="2500" dirty="0"/>
+          </a:p>
+          <a:p>
+            <a:pPr algn="l" indent="0" marL="0">
+              <a:buNone/>
+            </a:pPr>
+            <a:r>
+              <a:rPr lang="en-US" sz="2300" dirty="0">
+                <a:solidFill>
+                  <a:srgbClr val="000000"/>
+                </a:solidFill>
+              </a:rPr>
+              <a:t>D-Wave Advantage2: 5,000+ superconducting qubits on Pegasus P16 topology. QUBO variables are mapped to physical qubits via minor embedding, with coupled qubit chains representing binary decisions. QPU experiments use 1,000 reads at 200 μs anneal time with forward annealing.</a:t>
             </a:r>
             <a:endParaRPr lang="en-US" sz="2500" dirty="0"/>
           </a:p>
@@ -2282,14 +2313,39 @@
       </p:sp>
       <p:sp>
         <p:nvSpPr>
-          <p:cNvPr id="41" name="Text 39"/>
-          <p:cNvSpPr/>
-          <p:nvPr/>
-        </p:nvSpPr>
-        <p:spPr>
-          <a:xfrm>
-            <a:off x="731520" y="23591520"/>
-            <a:ext cx="11521440" cy="320040"/>
+          <p:cNvPr id="41" name="Shape 39"/>
+          <p:cNvSpPr/>
+          <p:nvPr/>
+        </p:nvSpPr>
+        <p:spPr>
+          <a:xfrm>
+            <a:off x="731520" y="22265640"/>
+            <a:ext cx="11521440" cy="1115568"/>
+          </a:xfrm>
+          <a:prstGeom prst="rect">
+            <a:avLst/>
+          </a:prstGeom>
+          <a:solidFill>
+            <a:srgbClr val="0D1B4B"/>
+          </a:solidFill>
+          <a:ln w="25400">
+            <a:solidFill>
+              <a:srgbClr val="00B4D8"/>
+            </a:solidFill>
+            <a:prstDash val="solid"/>
+          </a:ln>
+        </p:spPr>
+      </p:sp>
+      <p:sp>
+        <p:nvSpPr>
+          <p:cNvPr id="42" name="Text 40"/>
+          <p:cNvSpPr/>
+          <p:nvPr/>
+        </p:nvSpPr>
+        <p:spPr>
+          <a:xfrm>
+            <a:off x="868680" y="22265640"/>
+            <a:ext cx="11338560" cy="1115568"/>
           </a:xfrm>
           <a:prstGeom prst="rect">
             <a:avLst/>
@@ -2305,12 +2361,103 @@
               <a:buNone/>
             </a:pPr>
             <a:r>
+              <a:rPr lang="en-US" sz="2100" b="1" dirty="0">
+                <a:solidFill>
+                  <a:srgbClr val="00B4D8"/>
+                </a:solidFill>
+              </a:rPr>
+              <a:t>Matrix entries: </a:t>
+            </a:r>
+            <a:pPr algn="l" indent="0" marL="0">
+              <a:buNone/>
+            </a:pPr>
+            <a:r>
+              <a:rPr lang="en-US" sz="2100" dirty="0">
+                <a:solidFill>
+                  <a:srgbClr val="FFFFFF"/>
+                </a:solidFill>
+              </a:rPr>
+              <a:t>diagonal −1 · off-diagonal (conflicting vars) +2 · </a:t>
+            </a:r>
+            <a:pPr algn="l" indent="0" marL="0">
+              <a:buNone/>
+            </a:pPr>
+            <a:r>
+              <a:rPr lang="en-US" sz="2100" b="1" dirty="0">
+                <a:solidFill>
+                  <a:srgbClr val="00B4D8"/>
+                </a:solidFill>
+              </a:rPr>
+              <a:t>4×4:</a:t>
+            </a:r>
+            <a:pPr algn="l" indent="0" marL="0">
+              <a:buNone/>
+            </a:pPr>
+            <a:r>
+              <a:rPr lang="en-US" sz="2100" dirty="0">
+                <a:solidFill>
+                  <a:srgbClr val="FFFFFF"/>
+                </a:solidFill>
+              </a:rPr>
+              <a:t> 64×64 Q · </a:t>
+            </a:r>
+            <a:pPr algn="l" indent="0" marL="0">
+              <a:buNone/>
+            </a:pPr>
+            <a:r>
+              <a:rPr lang="en-US" sz="2100" b="1" dirty="0">
+                <a:solidFill>
+                  <a:srgbClr val="00B4D8"/>
+                </a:solidFill>
+              </a:rPr>
+              <a:t>9×9:</a:t>
+            </a:r>
+            <a:pPr algn="l" indent="0" marL="0">
+              <a:buNone/>
+            </a:pPr>
+            <a:r>
+              <a:rPr lang="en-US" sz="2100" dirty="0">
+                <a:solidFill>
+                  <a:srgbClr val="FFFFFF"/>
+                </a:solidFill>
+              </a:rPr>
+              <a:t> 459×459 Q (30 givens eliminated) · 90.6% sparse</a:t>
+            </a:r>
+            <a:endParaRPr lang="en-US" sz="2100" dirty="0"/>
+          </a:p>
+        </p:txBody>
+      </p:sp>
+      <p:sp>
+        <p:nvSpPr>
+          <p:cNvPr id="43" name="Text 41"/>
+          <p:cNvSpPr/>
+          <p:nvPr/>
+        </p:nvSpPr>
+        <p:spPr>
+          <a:xfrm>
+            <a:off x="731520" y="23454360"/>
+            <a:ext cx="11521440" cy="347472"/>
+          </a:xfrm>
+          <a:prstGeom prst="rect">
+            <a:avLst/>
+          </a:prstGeom>
+          <a:noFill/>
+          <a:ln/>
+        </p:spPr>
+        <p:txBody>
+          <a:bodyPr wrap="square" lIns="0" tIns="0" rIns="0" bIns="0" rtlCol="0" anchor="ctr"/>
+          <a:lstStyle/>
+          <a:p>
+            <a:pPr algn="l" indent="0" marL="0">
+              <a:buNone/>
+            </a:pPr>
+            <a:r>
               <a:rPr lang="en-US" sz="1800" i="1" dirty="0">
                 <a:solidFill>
                   <a:srgbClr val="3D4F60"/>
                 </a:solidFill>
               </a:rPr>
-              <a:t>Lagrange multipliers: λ₁=λ₂=λ₃=λ₄=1.0  ·  Diagonal: −1  ·  Off-diagonal: +2  ·  QUBO sparsity: 90.6% zeros</a:t>
+              <a:t>λ₁=λ₂=λ₃=λ₄=1.0  (Lagrange multipliers, all equal — penalty weight tuning is a future direction)</a:t>
             </a:r>
             <a:endParaRPr lang="en-US" sz="1800" dirty="0"/>
           </a:p>
@@ -2318,7 +2465,7 @@
       </p:sp>
       <p:sp>
         <p:nvSpPr>
-          <p:cNvPr id="42" name="Shape 40"/>
+          <p:cNvPr id="44" name="Shape 42"/>
           <p:cNvSpPr/>
           <p:nvPr/>
         </p:nvSpPr>
@@ -2343,7 +2490,7 @@
       </p:sp>
       <p:sp>
         <p:nvSpPr>
-          <p:cNvPr id="43" name="Shape 41"/>
+          <p:cNvPr id="45" name="Shape 43"/>
           <p:cNvSpPr/>
           <p:nvPr/>
         </p:nvSpPr>
@@ -2368,7 +2515,7 @@
       </p:sp>
       <p:sp>
         <p:nvSpPr>
-          <p:cNvPr id="44" name="Text 42"/>
+          <p:cNvPr id="46" name="Text 44"/>
           <p:cNvSpPr/>
           <p:nvPr/>
         </p:nvSpPr>
@@ -2404,7 +2551,7 @@
       </p:sp>
       <p:pic>
         <p:nvPicPr>
-          <p:cNvPr id="45" name="Image 0" descr="figures/vectorized/fig2_onehot_matrix_hires-1.png">    </p:cNvPr>
+          <p:cNvPr id="47" name="Image 0" descr="figures/vectorized/fig2_cropped.png">    </p:cNvPr>
           <p:cNvPicPr>
             <a:picLocks noChangeAspect="1"/>
           </p:cNvPicPr>
@@ -2412,13 +2559,14 @@
         </p:nvPicPr>
         <p:blipFill>
           <a:blip r:embed="rId1"/>
-          <a:srcRect l="-40754" r="-40754" t="0" b="0"/>
-          <a:stretch/>
+          <a:stretch>
+            <a:fillRect/>
+          </a:stretch>
         </p:blipFill>
         <p:spPr>
           <a:xfrm>
-            <a:off x="658368" y="24688800"/>
-            <a:ext cx="11667744" cy="6428232"/>
+            <a:off x="846645" y="24688800"/>
+            <a:ext cx="11291190" cy="6428232"/>
           </a:xfrm>
           <a:prstGeom prst="rect">
             <a:avLst/>
@@ -2427,7 +2575,7 @@
       </p:pic>
       <p:sp>
         <p:nvSpPr>
-          <p:cNvPr id="46" name="Shape 43"/>
+          <p:cNvPr id="48" name="Shape 45"/>
           <p:cNvSpPr/>
           <p:nvPr/>
         </p:nvSpPr>
@@ -2452,7 +2600,7 @@
       </p:sp>
       <p:sp>
         <p:nvSpPr>
-          <p:cNvPr id="47" name="Shape 44"/>
+          <p:cNvPr id="49" name="Shape 46"/>
           <p:cNvSpPr/>
           <p:nvPr/>
         </p:nvSpPr>
@@ -2477,7 +2625,7 @@
       </p:sp>
       <p:sp>
         <p:nvSpPr>
-          <p:cNvPr id="48" name="Text 45"/>
+          <p:cNvPr id="50" name="Text 47"/>
           <p:cNvSpPr/>
           <p:nvPr/>
         </p:nvSpPr>
@@ -2513,7 +2661,7 @@
       </p:sp>
       <p:pic>
         <p:nvPicPr>
-          <p:cNvPr id="49" name="Image 1" descr="figures/vectorized/dwave_qpu_box.jpg">    </p:cNvPr>
+          <p:cNvPr id="51" name="Image 1" descr="figures/vectorized/dwave_qpu_box.jpg">    </p:cNvPr>
           <p:cNvPicPr>
             <a:picLocks noChangeAspect="1"/>
           </p:cNvPicPr>
@@ -2536,7 +2684,7 @@
       </p:pic>
       <p:sp>
         <p:nvSpPr>
-          <p:cNvPr id="50" name="Text 46"/>
+          <p:cNvPr id="52" name="Text 48"/>
           <p:cNvSpPr/>
           <p:nvPr/>
         </p:nvSpPr>
@@ -2572,7 +2720,7 @@
       </p:sp>
       <p:sp>
         <p:nvSpPr>
-          <p:cNvPr id="51" name="Text 47"/>
+          <p:cNvPr id="53" name="Text 49"/>
           <p:cNvSpPr/>
           <p:nvPr/>
         </p:nvSpPr>
@@ -2694,7 +2842,7 @@
                   <a:srgbClr val="000000"/>
                 </a:solidFill>
               </a:rPr>
-              <a:t>• 4×4 blank (64 vars) — correctness baseline
+              <a:t>• 4×4 blank — 64 vars
 </a:t>
             </a:r>
             <a:endParaRPr lang="en-US" sz="2400" dirty="0"/>
@@ -2709,7 +2857,7 @@
                   <a:srgbClr val="000000"/>
                 </a:solidFill>
               </a:rPr>
-              <a:t>• 9×9 Easy   30 givens → 459 vars
+              <a:t>• 9×9 Easy — 30 givens, 459 vars
 </a:t>
             </a:r>
             <a:endParaRPr lang="en-US" sz="2400" dirty="0"/>
@@ -2724,7 +2872,7 @@
                   <a:srgbClr val="000000"/>
                 </a:solidFill>
               </a:rPr>
-              <a:t>• 9×9 Medium  25 givens → 504 vars
+              <a:t>• 9×9 Medium — 25 givens, 504 vars
 </a:t>
             </a:r>
             <a:endParaRPr lang="en-US" sz="2400" dirty="0"/>
@@ -2739,7 +2887,7 @@
                   <a:srgbClr val="000000"/>
                 </a:solidFill>
               </a:rPr>
-              <a:t>• 9×9 Hard    17 givens → 576 vars</a:t>
+              <a:t>• 9×9 Hard — 17 givens, 576 vars</a:t>
             </a:r>
             <a:endParaRPr lang="en-US" sz="2400" dirty="0"/>
           </a:p>
@@ -2747,14 +2895,14 @@
       </p:sp>
       <p:sp>
         <p:nvSpPr>
-          <p:cNvPr id="52" name="Shape 48"/>
+          <p:cNvPr id="54" name="Shape 50"/>
           <p:cNvSpPr/>
           <p:nvPr/>
         </p:nvSpPr>
         <p:spPr>
           <a:xfrm>
             <a:off x="13030200" y="10789920"/>
-            <a:ext cx="11887200" cy="11612880"/>
+            <a:ext cx="11887200" cy="8229600"/>
           </a:xfrm>
           <a:prstGeom prst="rect">
             <a:avLst/>
@@ -2772,7 +2920,7 @@
       </p:sp>
       <p:sp>
         <p:nvSpPr>
-          <p:cNvPr id="53" name="Shape 49"/>
+          <p:cNvPr id="55" name="Shape 51"/>
           <p:cNvSpPr/>
           <p:nvPr/>
         </p:nvSpPr>
@@ -2797,7 +2945,7 @@
       </p:sp>
       <p:sp>
         <p:nvSpPr>
-          <p:cNvPr id="54" name="Text 50"/>
+          <p:cNvPr id="56" name="Text 52"/>
           <p:cNvSpPr/>
           <p:nvPr/>
         </p:nvSpPr>
@@ -2825,7 +2973,7 @@
                   <a:srgbClr val="FFFFFF"/>
                 </a:solidFill>
               </a:rPr>
-              <a:t>QUBO COEFFICIENT MATRIX (4×4 SUDOKU, 64×64)</a:t>
+              <a:t>SUDOKU TEST PUZZLES (9×9 EASY &amp; HARD)</a:t>
             </a:r>
             <a:endParaRPr lang="en-US" sz="2600" dirty="0"/>
           </a:p>
@@ -2833,7 +2981,7 @@
       </p:sp>
       <p:pic>
         <p:nvPicPr>
-          <p:cNvPr id="55" name="Image 2" descr="figures/vectorized/fig4_qubo_matrix_hires-1.png">    </p:cNvPr>
+          <p:cNvPr id="57" name="Image 2" descr="figures/vectorized/fig1_2puzzles.png">    </p:cNvPr>
           <p:cNvPicPr>
             <a:picLocks noChangeAspect="1"/>
           </p:cNvPicPr>
@@ -2841,13 +2989,14 @@
         </p:nvPicPr>
         <p:blipFill>
           <a:blip r:embed="rId3"/>
-          <a:srcRect l="-4390" r="-4390" t="0" b="0"/>
-          <a:stretch/>
+          <a:stretch>
+            <a:fillRect/>
+          </a:stretch>
         </p:blipFill>
         <p:spPr>
           <a:xfrm>
-            <a:off x="13139928" y="11475720"/>
-            <a:ext cx="11667744" cy="10725912"/>
+            <a:off x="13139928" y="11672011"/>
+            <a:ext cx="11667744" cy="6950050"/>
           </a:xfrm>
           <a:prstGeom prst="rect">
             <a:avLst/>
@@ -2856,14 +3005,14 @@
       </p:pic>
       <p:sp>
         <p:nvSpPr>
-          <p:cNvPr id="56" name="Shape 51"/>
-          <p:cNvSpPr/>
-          <p:nvPr/>
-        </p:nvSpPr>
-        <p:spPr>
-          <a:xfrm>
-            <a:off x="13030200" y="22585680"/>
-            <a:ext cx="11887200" cy="8732520"/>
+          <p:cNvPr id="58" name="Shape 53"/>
+          <p:cNvSpPr/>
+          <p:nvPr/>
+        </p:nvSpPr>
+        <p:spPr>
+          <a:xfrm>
+            <a:off x="13030200" y="19202400"/>
+            <a:ext cx="11887200" cy="5029200"/>
           </a:xfrm>
           <a:prstGeom prst="rect">
             <a:avLst/>
@@ -2881,13 +3030,13 @@
       </p:sp>
       <p:sp>
         <p:nvSpPr>
-          <p:cNvPr id="57" name="Shape 52"/>
-          <p:cNvSpPr/>
-          <p:nvPr/>
-        </p:nvSpPr>
-        <p:spPr>
-          <a:xfrm>
-            <a:off x="13030200" y="22585680"/>
+          <p:cNvPr id="59" name="Shape 54"/>
+          <p:cNvSpPr/>
+          <p:nvPr/>
+        </p:nvSpPr>
+        <p:spPr>
+          <a:xfrm>
+            <a:off x="13030200" y="19202400"/>
             <a:ext cx="11887200" cy="566928"/>
           </a:xfrm>
           <a:prstGeom prst="rect">
@@ -2906,13 +3055,13 @@
       </p:sp>
       <p:sp>
         <p:nvSpPr>
-          <p:cNvPr id="58" name="Text 53"/>
-          <p:cNvSpPr/>
-          <p:nvPr/>
-        </p:nvSpPr>
-        <p:spPr>
-          <a:xfrm>
-            <a:off x="13194792" y="22585680"/>
+          <p:cNvPr id="60" name="Text 55"/>
+          <p:cNvSpPr/>
+          <p:nvPr/>
+        </p:nvSpPr>
+        <p:spPr>
+          <a:xfrm>
+            <a:off x="13194792" y="19202400"/>
             <a:ext cx="11704320" cy="566928"/>
           </a:xfrm>
           <a:prstGeom prst="rect">
@@ -2934,7 +3083,7 @@
                   <a:srgbClr val="FFFFFF"/>
                 </a:solidFill>
               </a:rPr>
-              <a:t>VARIABLE REDUCTION VIA GIVEN-CELL ELIMINATION</a:t>
+              <a:t>RESULTS: D-WAVE QPU VS. SIMULATED ANNEALING</a:t>
             </a:r>
             <a:endParaRPr lang="en-US" sz="2600" dirty="0"/>
           </a:p>
@@ -2942,7 +3091,7 @@
       </p:sp>
       <p:pic>
         <p:nvPicPr>
-          <p:cNvPr id="59" name="Image 3" descr="figures/vectorized/fig3_compression_hires-1.png">    </p:cNvPr>
+          <p:cNvPr id="61" name="Image 3" descr="figures/vectorized/fig5_cropped.png">    </p:cNvPr>
           <p:cNvPicPr>
             <a:picLocks noChangeAspect="1"/>
           </p:cNvPicPr>
@@ -2950,13 +3099,14 @@
         </p:nvPicPr>
         <p:blipFill>
           <a:blip r:embed="rId4"/>
-          <a:srcRect l="-24359" r="-24359" t="0" b="0"/>
-          <a:stretch/>
+          <a:stretch>
+            <a:fillRect/>
+          </a:stretch>
         </p:blipFill>
         <p:spPr>
           <a:xfrm>
-            <a:off x="13139928" y="23271480"/>
-            <a:ext cx="11667744" cy="7845552"/>
+            <a:off x="13139928" y="19985346"/>
+            <a:ext cx="11667744" cy="3947941"/>
           </a:xfrm>
           <a:prstGeom prst="rect">
             <a:avLst/>
@@ -2965,14 +3115,14 @@
       </p:pic>
       <p:sp>
         <p:nvSpPr>
-          <p:cNvPr id="60" name="Shape 54"/>
-          <p:cNvSpPr/>
-          <p:nvPr/>
-        </p:nvSpPr>
-        <p:spPr>
-          <a:xfrm>
-            <a:off x="25511760" y="4206240"/>
-            <a:ext cx="11887200" cy="6400800"/>
+          <p:cNvPr id="62" name="Shape 56"/>
+          <p:cNvSpPr/>
+          <p:nvPr/>
+        </p:nvSpPr>
+        <p:spPr>
+          <a:xfrm>
+            <a:off x="13030200" y="24414480"/>
+            <a:ext cx="11887200" cy="6903720"/>
           </a:xfrm>
           <a:prstGeom prst="rect">
             <a:avLst/>
@@ -2990,13 +3140,13 @@
       </p:sp>
       <p:sp>
         <p:nvSpPr>
-          <p:cNvPr id="61" name="Shape 55"/>
-          <p:cNvSpPr/>
-          <p:nvPr/>
-        </p:nvSpPr>
-        <p:spPr>
-          <a:xfrm>
-            <a:off x="25511760" y="4206240"/>
+          <p:cNvPr id="63" name="Shape 57"/>
+          <p:cNvSpPr/>
+          <p:nvPr/>
+        </p:nvSpPr>
+        <p:spPr>
+          <a:xfrm>
+            <a:off x="13030200" y="24414480"/>
             <a:ext cx="11887200" cy="566928"/>
           </a:xfrm>
           <a:prstGeom prst="rect">
@@ -3015,13 +3165,13 @@
       </p:sp>
       <p:sp>
         <p:nvSpPr>
-          <p:cNvPr id="62" name="Text 56"/>
-          <p:cNvSpPr/>
-          <p:nvPr/>
-        </p:nvSpPr>
-        <p:spPr>
-          <a:xfrm>
-            <a:off x="25676352" y="4206240"/>
+          <p:cNvPr id="64" name="Text 58"/>
+          <p:cNvSpPr/>
+          <p:nvPr/>
+        </p:nvSpPr>
+        <p:spPr>
+          <a:xfrm>
+            <a:off x="13194792" y="24414480"/>
             <a:ext cx="11704320" cy="566928"/>
           </a:xfrm>
           <a:prstGeom prst="rect">
@@ -3043,7 +3193,7 @@
                   <a:srgbClr val="FFFFFF"/>
                 </a:solidFill>
               </a:rPr>
-              <a:t>SUDOKU TEST PUZZLES</a:t>
+              <a:t>VARIABLE REDUCTION VIA GIVEN-CELL ELIMINATION</a:t>
             </a:r>
             <a:endParaRPr lang="en-US" sz="2600" dirty="0"/>
           </a:p>
@@ -3051,7 +3201,7 @@
       </p:sp>
       <p:pic>
         <p:nvPicPr>
-          <p:cNvPr id="63" name="Image 4" descr="figures/vectorized/fig1_sudoku_puzzles_hires-1.png">    </p:cNvPr>
+          <p:cNvPr id="65" name="Image 4" descr="figures/vectorized/fig3_cropped.png">    </p:cNvPr>
           <p:cNvPicPr>
             <a:picLocks noChangeAspect="1"/>
           </p:cNvPicPr>
@@ -3059,13 +3209,14 @@
         </p:nvPicPr>
         <p:blipFill>
           <a:blip r:embed="rId5"/>
-          <a:srcRect l="-55804" r="-55804" t="0" b="0"/>
-          <a:stretch/>
+          <a:stretch>
+            <a:fillRect/>
+          </a:stretch>
         </p:blipFill>
         <p:spPr>
           <a:xfrm>
-            <a:off x="25621488" y="4892040"/>
-            <a:ext cx="11667744" cy="5513832"/>
+            <a:off x="15197386" y="25100280"/>
+            <a:ext cx="7552829" cy="6016752"/>
           </a:xfrm>
           <a:prstGeom prst="rect">
             <a:avLst/>
@@ -3074,14 +3225,14 @@
       </p:pic>
       <p:sp>
         <p:nvSpPr>
-          <p:cNvPr id="64" name="Shape 57"/>
-          <p:cNvSpPr/>
-          <p:nvPr/>
-        </p:nvSpPr>
-        <p:spPr>
-          <a:xfrm>
-            <a:off x="25511760" y="10789920"/>
-            <a:ext cx="11887200" cy="5486400"/>
+          <p:cNvPr id="66" name="Shape 59"/>
+          <p:cNvSpPr/>
+          <p:nvPr/>
+        </p:nvSpPr>
+        <p:spPr>
+          <a:xfrm>
+            <a:off x="25511760" y="4206240"/>
+            <a:ext cx="11887200" cy="10972800"/>
           </a:xfrm>
           <a:prstGeom prst="rect">
             <a:avLst/>
@@ -3099,13 +3250,13 @@
       </p:sp>
       <p:sp>
         <p:nvSpPr>
-          <p:cNvPr id="65" name="Shape 58"/>
-          <p:cNvSpPr/>
-          <p:nvPr/>
-        </p:nvSpPr>
-        <p:spPr>
-          <a:xfrm>
-            <a:off x="25511760" y="10789920"/>
+          <p:cNvPr id="67" name="Shape 60"/>
+          <p:cNvSpPr/>
+          <p:nvPr/>
+        </p:nvSpPr>
+        <p:spPr>
+          <a:xfrm>
+            <a:off x="25511760" y="4206240"/>
             <a:ext cx="11887200" cy="566928"/>
           </a:xfrm>
           <a:prstGeom prst="rect">
@@ -3124,13 +3275,13 @@
       </p:sp>
       <p:sp>
         <p:nvSpPr>
-          <p:cNvPr id="66" name="Text 59"/>
-          <p:cNvSpPr/>
-          <p:nvPr/>
-        </p:nvSpPr>
-        <p:spPr>
-          <a:xfrm>
-            <a:off x="25676352" y="10789920"/>
+          <p:cNvPr id="68" name="Text 61"/>
+          <p:cNvSpPr/>
+          <p:nvPr/>
+        </p:nvSpPr>
+        <p:spPr>
+          <a:xfrm>
+            <a:off x="25676352" y="4206240"/>
             <a:ext cx="11704320" cy="566928"/>
           </a:xfrm>
           <a:prstGeom prst="rect">
@@ -3152,7 +3303,7 @@
                   <a:srgbClr val="FFFFFF"/>
                 </a:solidFill>
               </a:rPr>
-              <a:t>RESULTS: D-WAVE QPU VS. SIMULATED ANNEALING</a:t>
+              <a:t>QUBO COEFFICIENT MATRIX (4×4 SUDOKU, 64×64)</a:t>
             </a:r>
             <a:endParaRPr lang="en-US" sz="2600" dirty="0"/>
           </a:p>
@@ -3160,7 +3311,7 @@
       </p:sp>
       <p:pic>
         <p:nvPicPr>
-          <p:cNvPr id="67" name="Image 5" descr="figures/vectorized/fig5_comparison_table_hires-1.png">    </p:cNvPr>
+          <p:cNvPr id="69" name="Image 5" descr="figures/vectorized/fig4_qubo_matrix_hires-1.png">    </p:cNvPr>
           <p:cNvPicPr>
             <a:picLocks noChangeAspect="1"/>
           </p:cNvPicPr>
@@ -3168,13 +3319,14 @@
         </p:nvPicPr>
         <p:blipFill>
           <a:blip r:embed="rId6"/>
-          <a:srcRect l="-76839" r="-76839" t="0" b="0"/>
-          <a:stretch/>
+          <a:stretch>
+            <a:fillRect/>
+          </a:stretch>
         </p:blipFill>
         <p:spPr>
           <a:xfrm>
-            <a:off x="25621488" y="11475720"/>
-            <a:ext cx="11667744" cy="4599432"/>
+            <a:off x="26034225" y="4892040"/>
+            <a:ext cx="10842269" cy="10085832"/>
           </a:xfrm>
           <a:prstGeom prst="rect">
             <a:avLst/>
@@ -3183,14 +3335,14 @@
       </p:pic>
       <p:sp>
         <p:nvSpPr>
-          <p:cNvPr id="68" name="Shape 60"/>
-          <p:cNvSpPr/>
-          <p:nvPr/>
-        </p:nvSpPr>
-        <p:spPr>
-          <a:xfrm>
-            <a:off x="25511760" y="16459200"/>
-            <a:ext cx="11887200" cy="6400800"/>
+          <p:cNvPr id="70" name="Shape 62"/>
+          <p:cNvSpPr/>
+          <p:nvPr/>
+        </p:nvSpPr>
+        <p:spPr>
+          <a:xfrm>
+            <a:off x="25511760" y="15361920"/>
+            <a:ext cx="11887200" cy="5943600"/>
           </a:xfrm>
           <a:prstGeom prst="rect">
             <a:avLst/>
@@ -3208,13 +3360,13 @@
       </p:sp>
       <p:sp>
         <p:nvSpPr>
-          <p:cNvPr id="69" name="Shape 61"/>
-          <p:cNvSpPr/>
-          <p:nvPr/>
-        </p:nvSpPr>
-        <p:spPr>
-          <a:xfrm>
-            <a:off x="25511760" y="16459200"/>
+          <p:cNvPr id="71" name="Shape 63"/>
+          <p:cNvSpPr/>
+          <p:nvPr/>
+        </p:nvSpPr>
+        <p:spPr>
+          <a:xfrm>
+            <a:off x="25511760" y="15361920"/>
             <a:ext cx="11887200" cy="566928"/>
           </a:xfrm>
           <a:prstGeom prst="rect">
@@ -3233,13 +3385,13 @@
       </p:sp>
       <p:sp>
         <p:nvSpPr>
-          <p:cNvPr id="70" name="Text 62"/>
-          <p:cNvSpPr/>
-          <p:nvPr/>
-        </p:nvSpPr>
-        <p:spPr>
-          <a:xfrm>
-            <a:off x="25676352" y="16459200"/>
+          <p:cNvPr id="72" name="Text 64"/>
+          <p:cNvSpPr/>
+          <p:nvPr/>
+        </p:nvSpPr>
+        <p:spPr>
+          <a:xfrm>
+            <a:off x="25676352" y="15361920"/>
             <a:ext cx="11704320" cy="566928"/>
           </a:xfrm>
           <a:prstGeom prst="rect">
@@ -3269,14 +3421,14 @@
       </p:sp>
       <p:sp>
         <p:nvSpPr>
-          <p:cNvPr id="71" name="Text 63"/>
-          <p:cNvSpPr/>
-          <p:nvPr/>
-        </p:nvSpPr>
-        <p:spPr>
-          <a:xfrm>
-            <a:off x="25712928" y="17172432"/>
-            <a:ext cx="502920" cy="1005840"/>
+          <p:cNvPr id="73" name="Text 65"/>
+          <p:cNvSpPr/>
+          <p:nvPr/>
+        </p:nvSpPr>
+        <p:spPr>
+          <a:xfrm>
+            <a:off x="25712928" y="16020288"/>
+            <a:ext cx="502920" cy="868680"/>
           </a:xfrm>
           <a:prstGeom prst="rect">
             <a:avLst/>
@@ -3292,27 +3444,27 @@
               <a:buNone/>
             </a:pPr>
             <a:r>
-              <a:rPr lang="en-US" sz="2800" dirty="0">
+              <a:rPr lang="en-US" sz="2600" dirty="0">
                 <a:solidFill>
                   <a:srgbClr val="1A7A3C"/>
                 </a:solidFill>
               </a:rPr>
               <a:t>✅</a:t>
             </a:r>
-            <a:endParaRPr lang="en-US" sz="2800" dirty="0"/>
-          </a:p>
-        </p:txBody>
-      </p:sp>
-      <p:sp>
-        <p:nvSpPr>
-          <p:cNvPr id="72" name="Text 64"/>
-          <p:cNvSpPr/>
-          <p:nvPr/>
-        </p:nvSpPr>
-        <p:spPr>
-          <a:xfrm>
-            <a:off x="26261568" y="17172432"/>
-            <a:ext cx="10927080" cy="1005840"/>
+            <a:endParaRPr lang="en-US" sz="2600" dirty="0"/>
+          </a:p>
+        </p:txBody>
+      </p:sp>
+      <p:sp>
+        <p:nvSpPr>
+          <p:cNvPr id="74" name="Text 66"/>
+          <p:cNvSpPr/>
+          <p:nvPr/>
+        </p:nvSpPr>
+        <p:spPr>
+          <a:xfrm>
+            <a:off x="26261568" y="16020288"/>
+            <a:ext cx="10927080" cy="868680"/>
           </a:xfrm>
           <a:prstGeom prst="rect">
             <a:avLst/>
@@ -3328,27 +3480,27 @@
               <a:buNone/>
             </a:pPr>
             <a:r>
-              <a:rPr lang="en-US" sz="2100" dirty="0">
+              <a:rPr lang="en-US" sz="2000" dirty="0">
                 <a:solidFill>
                   <a:srgbClr val="1A202C"/>
                 </a:solidFill>
               </a:rPr>
               <a:t>SA: 99% success on 4×4 (64 vars) but 6%/0%/0% on 9×9 Easy/Medium/Hard — a 14× variable-density increase collapses classical performance.</a:t>
             </a:r>
-            <a:endParaRPr lang="en-US" sz="2100" dirty="0"/>
-          </a:p>
-        </p:txBody>
-      </p:sp>
-      <p:sp>
-        <p:nvSpPr>
-          <p:cNvPr id="73" name="Text 65"/>
-          <p:cNvSpPr/>
-          <p:nvPr/>
-        </p:nvSpPr>
-        <p:spPr>
-          <a:xfrm>
-            <a:off x="25712928" y="18306288"/>
-            <a:ext cx="502920" cy="1005840"/>
+            <a:endParaRPr lang="en-US" sz="2000" dirty="0"/>
+          </a:p>
+        </p:txBody>
+      </p:sp>
+      <p:sp>
+        <p:nvSpPr>
+          <p:cNvPr id="75" name="Text 67"/>
+          <p:cNvSpPr/>
+          <p:nvPr/>
+        </p:nvSpPr>
+        <p:spPr>
+          <a:xfrm>
+            <a:off x="25712928" y="17026128"/>
+            <a:ext cx="502920" cy="868680"/>
           </a:xfrm>
           <a:prstGeom prst="rect">
             <a:avLst/>
@@ -3364,27 +3516,27 @@
               <a:buNone/>
             </a:pPr>
             <a:r>
-              <a:rPr lang="en-US" sz="2800" dirty="0">
+              <a:rPr lang="en-US" sz="2600" dirty="0">
                 <a:solidFill>
                   <a:srgbClr val="0077A8"/>
                 </a:solidFill>
               </a:rPr>
               <a:t>⚡</a:t>
             </a:r>
-            <a:endParaRPr lang="en-US" sz="2800" dirty="0"/>
-          </a:p>
-        </p:txBody>
-      </p:sp>
-      <p:sp>
-        <p:nvSpPr>
-          <p:cNvPr id="74" name="Text 66"/>
-          <p:cNvSpPr/>
-          <p:nvPr/>
-        </p:nvSpPr>
-        <p:spPr>
-          <a:xfrm>
-            <a:off x="26261568" y="18306288"/>
-            <a:ext cx="10927080" cy="1005840"/>
+            <a:endParaRPr lang="en-US" sz="2600" dirty="0"/>
+          </a:p>
+        </p:txBody>
+      </p:sp>
+      <p:sp>
+        <p:nvSpPr>
+          <p:cNvPr id="76" name="Text 68"/>
+          <p:cNvSpPr/>
+          <p:nvPr/>
+        </p:nvSpPr>
+        <p:spPr>
+          <a:xfrm>
+            <a:off x="26261568" y="17026128"/>
+            <a:ext cx="10927080" cy="868680"/>
           </a:xfrm>
           <a:prstGeom prst="rect">
             <a:avLst/>
@@ -3400,27 +3552,27 @@
               <a:buNone/>
             </a:pPr>
             <a:r>
-              <a:rPr lang="en-US" sz="2100" dirty="0">
+              <a:rPr lang="en-US" sz="2000" dirty="0">
                 <a:solidFill>
                   <a:srgbClr val="1A202C"/>
                 </a:solidFill>
               </a:rPr>
               <a:t>Quantum tunneling advantage confirmed: D-Wave Hybrid solved Medium where all 100 SA runs failed, achieving E = 0 on a single attempt.</a:t>
             </a:r>
-            <a:endParaRPr lang="en-US" sz="2100" dirty="0"/>
-          </a:p>
-        </p:txBody>
-      </p:sp>
-      <p:sp>
-        <p:nvSpPr>
-          <p:cNvPr id="75" name="Text 67"/>
-          <p:cNvSpPr/>
-          <p:nvPr/>
-        </p:nvSpPr>
-        <p:spPr>
-          <a:xfrm>
-            <a:off x="25712928" y="19440144"/>
-            <a:ext cx="502920" cy="1005840"/>
+            <a:endParaRPr lang="en-US" sz="2000" dirty="0"/>
+          </a:p>
+        </p:txBody>
+      </p:sp>
+      <p:sp>
+        <p:nvSpPr>
+          <p:cNvPr id="77" name="Text 69"/>
+          <p:cNvSpPr/>
+          <p:nvPr/>
+        </p:nvSpPr>
+        <p:spPr>
+          <a:xfrm>
+            <a:off x="25712928" y="18031968"/>
+            <a:ext cx="502920" cy="868680"/>
           </a:xfrm>
           <a:prstGeom prst="rect">
             <a:avLst/>
@@ -3436,27 +3588,27 @@
               <a:buNone/>
             </a:pPr>
             <a:r>
-              <a:rPr lang="en-US" sz="2800" dirty="0">
+              <a:rPr lang="en-US" sz="2600" dirty="0">
                 <a:solidFill>
                   <a:srgbClr val="0077A8"/>
                 </a:solidFill>
               </a:rPr>
               <a:t>✔</a:t>
             </a:r>
-            <a:endParaRPr lang="en-US" sz="2800" dirty="0"/>
-          </a:p>
-        </p:txBody>
-      </p:sp>
-      <p:sp>
-        <p:nvSpPr>
-          <p:cNvPr id="76" name="Text 68"/>
-          <p:cNvSpPr/>
-          <p:nvPr/>
-        </p:nvSpPr>
-        <p:spPr>
-          <a:xfrm>
-            <a:off x="26261568" y="19440144"/>
-            <a:ext cx="10927080" cy="1005840"/>
+            <a:endParaRPr lang="en-US" sz="2600" dirty="0"/>
+          </a:p>
+        </p:txBody>
+      </p:sp>
+      <p:sp>
+        <p:nvSpPr>
+          <p:cNvPr id="78" name="Text 70"/>
+          <p:cNvSpPr/>
+          <p:nvPr/>
+        </p:nvSpPr>
+        <p:spPr>
+          <a:xfrm>
+            <a:off x="26261568" y="18031968"/>
+            <a:ext cx="10927080" cy="868680"/>
           </a:xfrm>
           <a:prstGeom prst="rect">
             <a:avLst/>
@@ -3472,27 +3624,27 @@
               <a:buNone/>
             </a:pPr>
             <a:r>
-              <a:rPr lang="en-US" sz="2100" dirty="0">
+              <a:rPr lang="en-US" sz="2000" dirty="0">
                 <a:solidFill>
                   <a:srgbClr val="1A202C"/>
                 </a:solidFill>
               </a:rPr>
               <a:t>Advantage2 QPU: 100% on Easy · 99.4% on Medium · 76.1% ± 12.7% on Hard — embedding complexity limits hard instances.</a:t>
             </a:r>
-            <a:endParaRPr lang="en-US" sz="2100" dirty="0"/>
-          </a:p>
-        </p:txBody>
-      </p:sp>
-      <p:sp>
-        <p:nvSpPr>
-          <p:cNvPr id="77" name="Text 69"/>
-          <p:cNvSpPr/>
-          <p:nvPr/>
-        </p:nvSpPr>
-        <p:spPr>
-          <a:xfrm>
-            <a:off x="25712928" y="20574000"/>
-            <a:ext cx="502920" cy="1005840"/>
+            <a:endParaRPr lang="en-US" sz="2000" dirty="0"/>
+          </a:p>
+        </p:txBody>
+      </p:sp>
+      <p:sp>
+        <p:nvSpPr>
+          <p:cNvPr id="79" name="Text 71"/>
+          <p:cNvSpPr/>
+          <p:nvPr/>
+        </p:nvSpPr>
+        <p:spPr>
+          <a:xfrm>
+            <a:off x="25712928" y="19037808"/>
+            <a:ext cx="502920" cy="868680"/>
           </a:xfrm>
           <a:prstGeom prst="rect">
             <a:avLst/>
@@ -3508,27 +3660,27 @@
               <a:buNone/>
             </a:pPr>
             <a:r>
-              <a:rPr lang="en-US" sz="2800" dirty="0">
+              <a:rPr lang="en-US" sz="2600" dirty="0">
                 <a:solidFill>
                   <a:srgbClr val="C0392B"/>
                 </a:solidFill>
               </a:rPr>
               <a:t>⚠</a:t>
             </a:r>
-            <a:endParaRPr lang="en-US" sz="2800" dirty="0"/>
-          </a:p>
-        </p:txBody>
-      </p:sp>
-      <p:sp>
-        <p:nvSpPr>
-          <p:cNvPr id="78" name="Text 70"/>
-          <p:cNvSpPr/>
-          <p:nvPr/>
-        </p:nvSpPr>
-        <p:spPr>
-          <a:xfrm>
-            <a:off x="26261568" y="20574000"/>
-            <a:ext cx="10927080" cy="1005840"/>
+            <a:endParaRPr lang="en-US" sz="2600" dirty="0"/>
+          </a:p>
+        </p:txBody>
+      </p:sp>
+      <p:sp>
+        <p:nvSpPr>
+          <p:cNvPr id="80" name="Text 72"/>
+          <p:cNvSpPr/>
+          <p:nvPr/>
+        </p:nvSpPr>
+        <p:spPr>
+          <a:xfrm>
+            <a:off x="26261568" y="19037808"/>
+            <a:ext cx="10927080" cy="868680"/>
           </a:xfrm>
           <a:prstGeom prst="rect">
             <a:avLst/>
@@ -3544,27 +3696,27 @@
               <a:buNone/>
             </a:pPr>
             <a:r>
-              <a:rPr lang="en-US" sz="2100" dirty="0">
+              <a:rPr lang="en-US" sz="2000" dirty="0">
                 <a:solidFill>
                   <a:srgbClr val="1A202C"/>
                 </a:solidFill>
               </a:rPr>
               <a:t>Both solvers failed on 17-clue Sudoku (E = 4): extreme constraint sparsity creates energy landscapes beyond current hardware.</a:t>
             </a:r>
-            <a:endParaRPr lang="en-US" sz="2100" dirty="0"/>
-          </a:p>
-        </p:txBody>
-      </p:sp>
-      <p:sp>
-        <p:nvSpPr>
-          <p:cNvPr id="79" name="Text 71"/>
-          <p:cNvSpPr/>
-          <p:nvPr/>
-        </p:nvSpPr>
-        <p:spPr>
-          <a:xfrm>
-            <a:off x="25712928" y="21707856"/>
-            <a:ext cx="502920" cy="1005840"/>
+            <a:endParaRPr lang="en-US" sz="2000" dirty="0"/>
+          </a:p>
+        </p:txBody>
+      </p:sp>
+      <p:sp>
+        <p:nvSpPr>
+          <p:cNvPr id="81" name="Text 73"/>
+          <p:cNvSpPr/>
+          <p:nvPr/>
+        </p:nvSpPr>
+        <p:spPr>
+          <a:xfrm>
+            <a:off x="25712928" y="20043648"/>
+            <a:ext cx="502920" cy="868680"/>
           </a:xfrm>
           <a:prstGeom prst="rect">
             <a:avLst/>
@@ -3580,27 +3732,27 @@
               <a:buNone/>
             </a:pPr>
             <a:r>
-              <a:rPr lang="en-US" sz="2800" dirty="0">
+              <a:rPr lang="en-US" sz="2600" dirty="0">
                 <a:solidFill>
                   <a:srgbClr val="3D4F60"/>
                 </a:solidFill>
               </a:rPr>
               <a:t>⏱</a:t>
             </a:r>
-            <a:endParaRPr lang="en-US" sz="2800" dirty="0"/>
-          </a:p>
-        </p:txBody>
-      </p:sp>
-      <p:sp>
-        <p:nvSpPr>
-          <p:cNvPr id="80" name="Text 72"/>
-          <p:cNvSpPr/>
-          <p:nvPr/>
-        </p:nvSpPr>
-        <p:spPr>
-          <a:xfrm>
-            <a:off x="26261568" y="21707856"/>
-            <a:ext cx="10927080" cy="1005840"/>
+            <a:endParaRPr lang="en-US" sz="2600" dirty="0"/>
+          </a:p>
+        </p:txBody>
+      </p:sp>
+      <p:sp>
+        <p:nvSpPr>
+          <p:cNvPr id="82" name="Text 74"/>
+          <p:cNvSpPr/>
+          <p:nvPr/>
+        </p:nvSpPr>
+        <p:spPr>
+          <a:xfrm>
+            <a:off x="26261568" y="20043648"/>
+            <a:ext cx="10927080" cy="868680"/>
           </a:xfrm>
           <a:prstGeom prst="rect">
             <a:avLst/>
@@ -3616,27 +3768,27 @@
               <a:buNone/>
             </a:pPr>
             <a:r>
-              <a:rPr lang="en-US" sz="2100" dirty="0">
+              <a:rPr lang="en-US" sz="2000" dirty="0">
                 <a:solidFill>
                   <a:srgbClr val="1A202C"/>
                 </a:solidFill>
               </a:rPr>
               <a:t>Hybrid averaged 1.72s vs. SA’s 1.96s — no quantum overhead penalty at this scale.</a:t>
             </a:r>
-            <a:endParaRPr lang="en-US" sz="2100" dirty="0"/>
-          </a:p>
-        </p:txBody>
-      </p:sp>
-      <p:sp>
-        <p:nvSpPr>
-          <p:cNvPr id="81" name="Shape 73"/>
-          <p:cNvSpPr/>
-          <p:nvPr/>
-        </p:nvSpPr>
-        <p:spPr>
-          <a:xfrm>
-            <a:off x="25511760" y="23042880"/>
-            <a:ext cx="11887200" cy="8275320"/>
+            <a:endParaRPr lang="en-US" sz="2000" dirty="0"/>
+          </a:p>
+        </p:txBody>
+      </p:sp>
+      <p:sp>
+        <p:nvSpPr>
+          <p:cNvPr id="83" name="Shape 75"/>
+          <p:cNvSpPr/>
+          <p:nvPr/>
+        </p:nvSpPr>
+        <p:spPr>
+          <a:xfrm>
+            <a:off x="25511760" y="21488400"/>
+            <a:ext cx="11887200" cy="5669280"/>
           </a:xfrm>
           <a:prstGeom prst="rect">
             <a:avLst/>
@@ -3654,13 +3806,13 @@
       </p:sp>
       <p:sp>
         <p:nvSpPr>
-          <p:cNvPr id="82" name="Shape 74"/>
-          <p:cNvSpPr/>
-          <p:nvPr/>
-        </p:nvSpPr>
-        <p:spPr>
-          <a:xfrm>
-            <a:off x="25511760" y="23042880"/>
+          <p:cNvPr id="84" name="Shape 76"/>
+          <p:cNvSpPr/>
+          <p:nvPr/>
+        </p:nvSpPr>
+        <p:spPr>
+          <a:xfrm>
+            <a:off x="25511760" y="21488400"/>
             <a:ext cx="11887200" cy="566928"/>
           </a:xfrm>
           <a:prstGeom prst="rect">
@@ -3679,13 +3831,13 @@
       </p:sp>
       <p:sp>
         <p:nvSpPr>
-          <p:cNvPr id="83" name="Text 75"/>
-          <p:cNvSpPr/>
-          <p:nvPr/>
-        </p:nvSpPr>
-        <p:spPr>
-          <a:xfrm>
-            <a:off x="25676352" y="23042880"/>
+          <p:cNvPr id="85" name="Text 77"/>
+          <p:cNvSpPr/>
+          <p:nvPr/>
+        </p:nvSpPr>
+        <p:spPr>
+          <a:xfrm>
+            <a:off x="25676352" y="21488400"/>
             <a:ext cx="11704320" cy="566928"/>
           </a:xfrm>
           <a:prstGeom prst="rect">
@@ -3707,7 +3859,7 @@
                   <a:srgbClr val="FFFFFF"/>
                 </a:solidFill>
               </a:rPr>
-              <a:t>CONCLUSIONS &amp; FUTURE WORK</a:t>
+              <a:t>CONCLUSIONS</a:t>
             </a:r>
             <a:endParaRPr lang="en-US" sz="2600" dirty="0"/>
           </a:p>
@@ -3715,14 +3867,14 @@
       </p:sp>
       <p:sp>
         <p:nvSpPr>
-          <p:cNvPr id="84" name="Text 76"/>
-          <p:cNvSpPr/>
-          <p:nvPr/>
-        </p:nvSpPr>
-        <p:spPr>
-          <a:xfrm>
-            <a:off x="25694640" y="23756112"/>
-            <a:ext cx="11567160" cy="7470648"/>
+          <p:cNvPr id="86" name="Text 78"/>
+          <p:cNvSpPr/>
+          <p:nvPr/>
+        </p:nvSpPr>
+        <p:spPr>
+          <a:xfrm>
+            <a:off x="25694640" y="22146768"/>
+            <a:ext cx="11567160" cy="4919472"/>
           </a:xfrm>
           <a:prstGeom prst="rect">
             <a:avLst/>
@@ -3773,7 +3925,7 @@
                   <a:srgbClr val="000000"/>
                 </a:solidFill>
               </a:rPr>
-              <a:t>• Advantage2 QPU matches SA on easy instances; embedding limits emerge on harder ones.
+              <a:t>• Advantage2 QPU matches SA on easy instances; embedding complexity limits harder ones.
 </a:t>
             </a:r>
             <a:endParaRPr lang="en-US" sz="2200" dirty="0"/>
@@ -3788,7 +3940,7 @@
                   <a:srgbClr val="000000"/>
                 </a:solidFill>
               </a:rPr>
-              <a:t>• Given-cell elimination is essential: 37% variable reduction (729→459 vars) on 9×9 Easy.
+              <a:t>• Given-cell elimination reduces 9×9 variables by 37% (729→459 free vars) — essential for feasible embedding.
 </a:t>
             </a:r>
             <a:endParaRPr lang="en-US" sz="2200" dirty="0"/>
@@ -3803,97 +3955,47 @@
                   <a:srgbClr val="000000"/>
                 </a:solidFill>
               </a:rPr>
-              <a:t>• Execution times are competitive: hybrid 1.72s vs. SA 1.96s — quantum overhead is not a barrier.
-</a:t>
+              <a:t>• Execution times competitive: hybrid 1.72s vs. SA 1.96s — quantum overhead is not a barrier.</a:t>
             </a:r>
             <a:endParaRPr lang="en-US" sz="2200" dirty="0"/>
           </a:p>
-          <a:p>
-            <a:pPr algn="l" indent="0" marL="0">
-              <a:buNone/>
-            </a:pPr>
-            <a:r>
-              <a:rPr lang="en-US" sz="2400" b="1" dirty="0">
-                <a:solidFill>
-                  <a:srgbClr val="000000"/>
-                </a:solidFill>
-              </a:rPr>
-              <a:t>Future Directions
-</a:t>
-            </a:r>
-            <a:endParaRPr lang="en-US" sz="2200" dirty="0"/>
-          </a:p>
-          <a:p>
-            <a:pPr algn="l" indent="0" marL="0">
-              <a:buNone/>
-            </a:pPr>
-            <a:r>
-              <a:rPr lang="en-US" sz="2200" dirty="0">
-                <a:solidFill>
-                  <a:srgbClr val="000000"/>
-                </a:solidFill>
-              </a:rPr>
-              <a:t>• Penalty weight optimization per constraint type (λ₁…λ₄ tuning)
-</a:t>
-            </a:r>
-            <a:endParaRPr lang="en-US" sz="2200" dirty="0"/>
-          </a:p>
-          <a:p>
-            <a:pPr algn="l" indent="0" marL="0">
-              <a:buNone/>
-            </a:pPr>
-            <a:r>
-              <a:rPr lang="en-US" sz="2200" dirty="0">
-                <a:solidFill>
-                  <a:srgbClr val="000000"/>
-                </a:solidFill>
-              </a:rPr>
-              <a:t>• Domain-wall encoding to further reduce variable count
-</a:t>
-            </a:r>
-            <a:endParaRPr lang="en-US" sz="2200" dirty="0"/>
-          </a:p>
-          <a:p>
-            <a:pPr algn="l" indent="0" marL="0">
-              <a:buNone/>
-            </a:pPr>
-            <a:r>
-              <a:rPr lang="en-US" sz="2200" dirty="0">
-                <a:solidFill>
-                  <a:srgbClr val="000000"/>
-                </a:solidFill>
-              </a:rPr>
-              <a:t>• Direct Advantage QPU access for full 9×9 benchmarks
-</a:t>
-            </a:r>
-            <a:endParaRPr lang="en-US" sz="2200" dirty="0"/>
-          </a:p>
-          <a:p>
-            <a:pPr algn="l" indent="0" marL="0">
-              <a:buNone/>
-            </a:pPr>
-            <a:r>
-              <a:rPr lang="en-US" sz="2200" dirty="0">
-                <a:solidFill>
-                  <a:srgbClr val="000000"/>
-                </a:solidFill>
-              </a:rPr>
-              <a:t>• Systematic benchmarking across full puzzle difficulty distributions</a:t>
-            </a:r>
-            <a:endParaRPr lang="en-US" sz="2200" dirty="0"/>
-          </a:p>
-        </p:txBody>
-      </p:sp>
-      <p:sp>
-        <p:nvSpPr>
-          <p:cNvPr id="85" name="Shape 77"/>
-          <p:cNvSpPr/>
-          <p:nvPr/>
-        </p:nvSpPr>
-        <p:spPr>
-          <a:xfrm>
-            <a:off x="0" y="31455360"/>
-            <a:ext cx="38404800" cy="1463040"/>
+        </p:txBody>
+      </p:sp>
+      <p:sp>
+        <p:nvSpPr>
+          <p:cNvPr id="87" name="Shape 79"/>
+          <p:cNvSpPr/>
+          <p:nvPr/>
+        </p:nvSpPr>
+        <p:spPr>
+          <a:xfrm>
+            <a:off x="25511760" y="27340560"/>
+            <a:ext cx="11887200" cy="3977640"/>
+          </a:xfrm>
+          <a:prstGeom prst="rect">
+            <a:avLst/>
+          </a:prstGeom>
+          <a:solidFill>
+            <a:srgbClr val="E8F4FA"/>
+          </a:solidFill>
+          <a:ln w="19050">
+            <a:solidFill>
+              <a:srgbClr val="B8D0E8"/>
+            </a:solidFill>
+            <a:prstDash val="solid"/>
+          </a:ln>
+        </p:spPr>
+      </p:sp>
+      <p:sp>
+        <p:nvSpPr>
+          <p:cNvPr id="88" name="Shape 80"/>
+          <p:cNvSpPr/>
+          <p:nvPr/>
+        </p:nvSpPr>
+        <p:spPr>
+          <a:xfrm>
+            <a:off x="25511760" y="27340560"/>
+            <a:ext cx="11887200" cy="566928"/>
           </a:xfrm>
           <a:prstGeom prst="rect">
             <a:avLst/>
@@ -3911,7 +4013,164 @@
       </p:sp>
       <p:sp>
         <p:nvSpPr>
-          <p:cNvPr id="86" name="Shape 78"/>
+          <p:cNvPr id="89" name="Text 81"/>
+          <p:cNvSpPr/>
+          <p:nvPr/>
+        </p:nvSpPr>
+        <p:spPr>
+          <a:xfrm>
+            <a:off x="25676352" y="27340560"/>
+            <a:ext cx="11704320" cy="566928"/>
+          </a:xfrm>
+          <a:prstGeom prst="rect">
+            <a:avLst/>
+          </a:prstGeom>
+          <a:noFill/>
+          <a:ln/>
+        </p:spPr>
+        <p:txBody>
+          <a:bodyPr wrap="square" lIns="0" tIns="0" rIns="0" bIns="0" rtlCol="0" anchor="ctr"/>
+          <a:lstStyle/>
+          <a:p>
+            <a:pPr algn="l" indent="0" marL="0">
+              <a:buNone/>
+            </a:pPr>
+            <a:r>
+              <a:rPr lang="en-US" sz="2600" b="1" spc="200" kern="0" dirty="0">
+                <a:solidFill>
+                  <a:srgbClr val="FFFFFF"/>
+                </a:solidFill>
+              </a:rPr>
+              <a:t>FUTURE DIRECTIONS</a:t>
+            </a:r>
+            <a:endParaRPr lang="en-US" sz="2600" dirty="0"/>
+          </a:p>
+        </p:txBody>
+      </p:sp>
+      <p:sp>
+        <p:nvSpPr>
+          <p:cNvPr id="90" name="Text 82"/>
+          <p:cNvSpPr/>
+          <p:nvPr/>
+        </p:nvSpPr>
+        <p:spPr>
+          <a:xfrm>
+            <a:off x="25694640" y="27998928"/>
+            <a:ext cx="11567160" cy="3227832"/>
+          </a:xfrm>
+          <a:prstGeom prst="rect">
+            <a:avLst/>
+          </a:prstGeom>
+          <a:noFill/>
+          <a:ln/>
+        </p:spPr>
+        <p:txBody>
+          <a:bodyPr wrap="square" rtlCol="0" anchor="t"/>
+          <a:lstStyle/>
+          <a:p>
+            <a:pPr algn="l" indent="0" marL="0">
+              <a:buNone/>
+            </a:pPr>
+            <a:r>
+              <a:rPr lang="en-US" sz="2200" dirty="0">
+                <a:solidFill>
+                  <a:srgbClr val="000000"/>
+                </a:solidFill>
+              </a:rPr>
+              <a:t>• Penalty weight optimization per constraint type (λ₁…λ₄ tuning)
+</a:t>
+            </a:r>
+            <a:endParaRPr lang="en-US" sz="2200" dirty="0"/>
+          </a:p>
+          <a:p>
+            <a:pPr algn="l" indent="0" marL="0">
+              <a:buNone/>
+            </a:pPr>
+            <a:r>
+              <a:rPr lang="en-US" sz="2200" dirty="0">
+                <a:solidFill>
+                  <a:srgbClr val="000000"/>
+                </a:solidFill>
+              </a:rPr>
+              <a:t>• Domain-wall encoding to further reduce variable count below one-hot
+</a:t>
+            </a:r>
+            <a:endParaRPr lang="en-US" sz="2200" dirty="0"/>
+          </a:p>
+          <a:p>
+            <a:pPr algn="l" indent="0" marL="0">
+              <a:buNone/>
+            </a:pPr>
+            <a:r>
+              <a:rPr lang="en-US" sz="2200" dirty="0">
+                <a:solidFill>
+                  <a:srgbClr val="000000"/>
+                </a:solidFill>
+              </a:rPr>
+              <a:t>• Direct Advantage QPU access for full 9×9 benchmarks
+</a:t>
+            </a:r>
+            <a:endParaRPr lang="en-US" sz="2200" dirty="0"/>
+          </a:p>
+          <a:p>
+            <a:pPr algn="l" indent="0" marL="0">
+              <a:buNone/>
+            </a:pPr>
+            <a:r>
+              <a:rPr lang="en-US" sz="2200" dirty="0">
+                <a:solidFill>
+                  <a:srgbClr val="000000"/>
+                </a:solidFill>
+              </a:rPr>
+              <a:t>• Systematic benchmarking across full puzzle difficulty distributions
+</a:t>
+            </a:r>
+            <a:endParaRPr lang="en-US" sz="2200" dirty="0"/>
+          </a:p>
+          <a:p>
+            <a:pPr algn="l" indent="0" marL="0">
+              <a:buNone/>
+            </a:pPr>
+            <a:r>
+              <a:rPr lang="en-US" sz="2200" dirty="0">
+                <a:solidFill>
+                  <a:srgbClr val="000000"/>
+                </a:solidFill>
+              </a:rPr>
+              <a:t>• Hybrid decomposition strategies for larger grid sizes (16×16 and beyond)</a:t>
+            </a:r>
+            <a:endParaRPr lang="en-US" sz="2200" dirty="0"/>
+          </a:p>
+        </p:txBody>
+      </p:sp>
+      <p:sp>
+        <p:nvSpPr>
+          <p:cNvPr id="91" name="Shape 83"/>
+          <p:cNvSpPr/>
+          <p:nvPr/>
+        </p:nvSpPr>
+        <p:spPr>
+          <a:xfrm>
+            <a:off x="0" y="31455360"/>
+            <a:ext cx="38404800" cy="1463040"/>
+          </a:xfrm>
+          <a:prstGeom prst="rect">
+            <a:avLst/>
+          </a:prstGeom>
+          <a:solidFill>
+            <a:srgbClr val="0D1B4B"/>
+          </a:solidFill>
+          <a:ln w="12700">
+            <a:solidFill>
+              <a:srgbClr val="0D1B4B"/>
+            </a:solidFill>
+            <a:prstDash val="solid"/>
+          </a:ln>
+        </p:spPr>
+      </p:sp>
+      <p:sp>
+        <p:nvSpPr>
+          <p:cNvPr id="92" name="Shape 84"/>
           <p:cNvSpPr/>
           <p:nvPr/>
         </p:nvSpPr>
@@ -3936,7 +4195,7 @@
       </p:sp>
       <p:sp>
         <p:nvSpPr>
-          <p:cNvPr id="87" name="Text 79"/>
+          <p:cNvPr id="93" name="Text 85"/>
           <p:cNvSpPr/>
           <p:nvPr/>
         </p:nvSpPr>
@@ -3983,7 +4242,7 @@
       </p:sp>
       <p:pic>
         <p:nvPicPr>
-          <p:cNvPr id="88" name="Image 6" descr="figures/vectorized/qr_code.png">    </p:cNvPr>
+          <p:cNvPr id="94" name="Image 6" descr="figures/vectorized/qr_code.png">    </p:cNvPr>
           <p:cNvPicPr>
             <a:picLocks noChangeAspect="1"/>
           </p:cNvPicPr>

--- a/quantum_sudoku_poster_v2.pptx
+++ b/quantum_sudoku_poster_v2.pptx
@@ -958,7 +958,7 @@
                 <a:ea typeface="Calibri" pitchFamily="34" charset="-122"/>
                 <a:cs typeface="Calibri" pitchFamily="34" charset="-120"/>
               </a:rPr>
-              <a:t>Grid-Based Quantum Annealing for Sudoku</a:t>
+              <a:t>One-Hot Quantum Annealing for Sudoku</a:t>
             </a:r>
             <a:endParaRPr lang="en-US" sz="9600" dirty="0"/>
           </a:p>
@@ -1481,7 +1481,7 @@
         <p:spPr>
           <a:xfrm>
             <a:off x="548640" y="13533120"/>
-            <a:ext cx="11887200" cy="10287000"/>
+            <a:ext cx="11887200" cy="11201400"/>
           </a:xfrm>
           <a:prstGeom prst="rect">
             <a:avLst/>
@@ -1733,7 +1733,7 @@
         <p:spPr>
           <a:xfrm>
             <a:off x="731520" y="16139160"/>
-            <a:ext cx="11521440" cy="594360"/>
+            <a:ext cx="11521440" cy="685800"/>
           </a:xfrm>
           <a:prstGeom prst="rect">
             <a:avLst/>
@@ -1749,7 +1749,7 @@
               <a:buNone/>
             </a:pPr>
             <a:r>
-              <a:rPr lang="en-US" sz="3100" b="1" dirty="0">
+              <a:rPr lang="en-US" sz="3400" b="1" dirty="0">
                 <a:solidFill>
                   <a:srgbClr val="0077A8"/>
                 </a:solidFill>
@@ -1759,7 +1759,7 @@
               </a:rPr>
               <a:t>Eₜₒₜₐₗ = E₁ + E₂ + E₃ + E₄ = 0  ⇒  Valid Sudoku</a:t>
             </a:r>
-            <a:endParaRPr lang="en-US" sz="3100" dirty="0"/>
+            <a:endParaRPr lang="en-US" sz="3400" dirty="0"/>
           </a:p>
         </p:txBody>
       </p:sp>
@@ -1771,8 +1771,8 @@
         </p:nvSpPr>
         <p:spPr>
           <a:xfrm>
-            <a:off x="731520" y="16898112"/>
-            <a:ext cx="2468880" cy="1207008"/>
+            <a:off x="731520" y="16989552"/>
+            <a:ext cx="2468880" cy="1335024"/>
           </a:xfrm>
           <a:prstGeom prst="rect">
             <a:avLst/>
@@ -1796,8 +1796,8 @@
         </p:nvSpPr>
         <p:spPr>
           <a:xfrm>
-            <a:off x="731520" y="16898112"/>
-            <a:ext cx="2468880" cy="1207008"/>
+            <a:off x="731520" y="16989552"/>
+            <a:ext cx="2468880" cy="1335024"/>
           </a:xfrm>
           <a:prstGeom prst="rect">
             <a:avLst/>
@@ -1813,14 +1813,14 @@
               <a:buNone/>
             </a:pPr>
             <a:r>
-              <a:rPr lang="en-US" sz="2200" b="1" dirty="0">
+              <a:rPr lang="en-US" sz="2400" b="1" dirty="0">
                 <a:solidFill>
                   <a:srgbClr val="FFFFFF"/>
                 </a:solidFill>
               </a:rPr>
               <a:t>E₁  Cell</a:t>
             </a:r>
-            <a:endParaRPr lang="en-US" sz="2200" dirty="0"/>
+            <a:endParaRPr lang="en-US" sz="2400" dirty="0"/>
           </a:p>
         </p:txBody>
       </p:sp>
@@ -1832,8 +1832,8 @@
         </p:nvSpPr>
         <p:spPr>
           <a:xfrm>
-            <a:off x="3218688" y="16898112"/>
-            <a:ext cx="9034272" cy="1207008"/>
+            <a:off x="3218688" y="16989552"/>
+            <a:ext cx="9034272" cy="1335024"/>
           </a:xfrm>
           <a:prstGeom prst="rect">
             <a:avLst/>
@@ -1857,8 +1857,8 @@
         </p:nvSpPr>
         <p:spPr>
           <a:xfrm>
-            <a:off x="3383280" y="16898112"/>
-            <a:ext cx="8851392" cy="1207008"/>
+            <a:off x="3383280" y="16989552"/>
+            <a:ext cx="8851392" cy="1335024"/>
           </a:xfrm>
           <a:prstGeom prst="rect">
             <a:avLst/>
@@ -1874,29 +1874,25 @@
               <a:buNone/>
             </a:pPr>
             <a:r>
-              <a:rPr lang="en-US" sz="2200" b="1" dirty="0">
-                <a:solidFill>
-                  <a:srgbClr val="000000"/>
-                </a:solidFill>
-              </a:rPr>
-              <a:t>Σᵢⱼ (Σₖ xᵢⱼₖ − 1)²
-</a:t>
-            </a:r>
-            <a:endParaRPr lang="en-US" sz="2200" dirty="0"/>
-          </a:p>
-          <a:p>
-            <a:pPr algn="l" indent="0" marL="0">
-              <a:buNone/>
-            </a:pPr>
-            <a:r>
-              <a:rPr lang="en-US" sz="2000" i="1" dirty="0">
+              <a:rPr lang="en-US" sz="3400" b="1" dirty="0">
+                <a:solidFill>
+                  <a:srgbClr val="0D1B4B"/>
+                </a:solidFill>
+              </a:rPr>
+              <a:t>Σᵢⱼ (Σₖ xᵢⱼₖ − 1)²  —  </a:t>
+            </a:r>
+            <a:pPr algn="l" indent="0" marL="0">
+              <a:buNone/>
+            </a:pPr>
+            <a:r>
+              <a:rPr lang="en-US" sz="2400" i="1" dirty="0">
                 <a:solidFill>
                   <a:srgbClr val="3D4F60"/>
                 </a:solidFill>
               </a:rPr>
-              <a:t>each cell has exactly one digit</a:t>
-            </a:r>
-            <a:endParaRPr lang="en-US" sz="2200" dirty="0"/>
+              <a:t>each cell holds exactly one digit</a:t>
+            </a:r>
+            <a:endParaRPr lang="en-US" sz="3400" dirty="0"/>
           </a:p>
         </p:txBody>
       </p:sp>
@@ -1908,8 +1904,8 @@
         </p:nvSpPr>
         <p:spPr>
           <a:xfrm>
-            <a:off x="731520" y="18223992"/>
-            <a:ext cx="2468880" cy="1207008"/>
+            <a:off x="731520" y="18452592"/>
+            <a:ext cx="2468880" cy="1335024"/>
           </a:xfrm>
           <a:prstGeom prst="rect">
             <a:avLst/>
@@ -1933,8 +1929,8 @@
         </p:nvSpPr>
         <p:spPr>
           <a:xfrm>
-            <a:off x="731520" y="18223992"/>
-            <a:ext cx="2468880" cy="1207008"/>
+            <a:off x="731520" y="18452592"/>
+            <a:ext cx="2468880" cy="1335024"/>
           </a:xfrm>
           <a:prstGeom prst="rect">
             <a:avLst/>
@@ -1950,14 +1946,14 @@
               <a:buNone/>
             </a:pPr>
             <a:r>
-              <a:rPr lang="en-US" sz="2200" b="1" dirty="0">
+              <a:rPr lang="en-US" sz="2400" b="1" dirty="0">
                 <a:solidFill>
                   <a:srgbClr val="FFFFFF"/>
                 </a:solidFill>
               </a:rPr>
               <a:t>E₂  Row</a:t>
             </a:r>
-            <a:endParaRPr lang="en-US" sz="2200" dirty="0"/>
+            <a:endParaRPr lang="en-US" sz="2400" dirty="0"/>
           </a:p>
         </p:txBody>
       </p:sp>
@@ -1969,8 +1965,8 @@
         </p:nvSpPr>
         <p:spPr>
           <a:xfrm>
-            <a:off x="3218688" y="18223992"/>
-            <a:ext cx="9034272" cy="1207008"/>
+            <a:off x="3218688" y="18452592"/>
+            <a:ext cx="9034272" cy="1335024"/>
           </a:xfrm>
           <a:prstGeom prst="rect">
             <a:avLst/>
@@ -1994,8 +1990,8 @@
         </p:nvSpPr>
         <p:spPr>
           <a:xfrm>
-            <a:off x="3383280" y="18223992"/>
-            <a:ext cx="8851392" cy="1207008"/>
+            <a:off x="3383280" y="18452592"/>
+            <a:ext cx="8851392" cy="1335024"/>
           </a:xfrm>
           <a:prstGeom prst="rect">
             <a:avLst/>
@@ -2011,29 +2007,25 @@
               <a:buNone/>
             </a:pPr>
             <a:r>
-              <a:rPr lang="en-US" sz="2200" b="1" dirty="0">
-                <a:solidFill>
-                  <a:srgbClr val="000000"/>
-                </a:solidFill>
-              </a:rPr>
-              <a:t>Σᵢₖ (Σⱼ xᵢⱼₖ − 1)²
-</a:t>
-            </a:r>
-            <a:endParaRPr lang="en-US" sz="2200" dirty="0"/>
-          </a:p>
-          <a:p>
-            <a:pPr algn="l" indent="0" marL="0">
-              <a:buNone/>
-            </a:pPr>
-            <a:r>
-              <a:rPr lang="en-US" sz="2000" i="1" dirty="0">
+              <a:rPr lang="en-US" sz="3400" b="1" dirty="0">
+                <a:solidFill>
+                  <a:srgbClr val="0D1B4B"/>
+                </a:solidFill>
+              </a:rPr>
+              <a:t>Σᵢₖ (Σⱼ xᵢⱼₖ − 1)²  —  </a:t>
+            </a:r>
+            <a:pPr algn="l" indent="0" marL="0">
+              <a:buNone/>
+            </a:pPr>
+            <a:r>
+              <a:rPr lang="en-US" sz="2400" i="1" dirty="0">
                 <a:solidFill>
                   <a:srgbClr val="3D4F60"/>
                 </a:solidFill>
               </a:rPr>
               <a:t>each digit appears once per row</a:t>
             </a:r>
-            <a:endParaRPr lang="en-US" sz="2200" dirty="0"/>
+            <a:endParaRPr lang="en-US" sz="3400" dirty="0"/>
           </a:p>
         </p:txBody>
       </p:sp>
@@ -2045,8 +2037,8 @@
         </p:nvSpPr>
         <p:spPr>
           <a:xfrm>
-            <a:off x="731520" y="19549872"/>
-            <a:ext cx="2468880" cy="1207008"/>
+            <a:off x="731520" y="19915632"/>
+            <a:ext cx="2468880" cy="1335024"/>
           </a:xfrm>
           <a:prstGeom prst="rect">
             <a:avLst/>
@@ -2070,8 +2062,8 @@
         </p:nvSpPr>
         <p:spPr>
           <a:xfrm>
-            <a:off x="731520" y="19549872"/>
-            <a:ext cx="2468880" cy="1207008"/>
+            <a:off x="731520" y="19915632"/>
+            <a:ext cx="2468880" cy="1335024"/>
           </a:xfrm>
           <a:prstGeom prst="rect">
             <a:avLst/>
@@ -2087,14 +2079,14 @@
               <a:buNone/>
             </a:pPr>
             <a:r>
-              <a:rPr lang="en-US" sz="2200" b="1" dirty="0">
+              <a:rPr lang="en-US" sz="2400" b="1" dirty="0">
                 <a:solidFill>
                   <a:srgbClr val="FFFFFF"/>
                 </a:solidFill>
               </a:rPr>
               <a:t>E₃  Column</a:t>
             </a:r>
-            <a:endParaRPr lang="en-US" sz="2200" dirty="0"/>
+            <a:endParaRPr lang="en-US" sz="2400" dirty="0"/>
           </a:p>
         </p:txBody>
       </p:sp>
@@ -2106,8 +2098,8 @@
         </p:nvSpPr>
         <p:spPr>
           <a:xfrm>
-            <a:off x="3218688" y="19549872"/>
-            <a:ext cx="9034272" cy="1207008"/>
+            <a:off x="3218688" y="19915632"/>
+            <a:ext cx="9034272" cy="1335024"/>
           </a:xfrm>
           <a:prstGeom prst="rect">
             <a:avLst/>
@@ -2131,8 +2123,8 @@
         </p:nvSpPr>
         <p:spPr>
           <a:xfrm>
-            <a:off x="3383280" y="19549872"/>
-            <a:ext cx="8851392" cy="1207008"/>
+            <a:off x="3383280" y="19915632"/>
+            <a:ext cx="8851392" cy="1335024"/>
           </a:xfrm>
           <a:prstGeom prst="rect">
             <a:avLst/>
@@ -2148,29 +2140,25 @@
               <a:buNone/>
             </a:pPr>
             <a:r>
-              <a:rPr lang="en-US" sz="2200" b="1" dirty="0">
-                <a:solidFill>
-                  <a:srgbClr val="000000"/>
-                </a:solidFill>
-              </a:rPr>
-              <a:t>Σⱼₖ (Σᵢ xᵢⱼₖ − 1)²
-</a:t>
-            </a:r>
-            <a:endParaRPr lang="en-US" sz="2200" dirty="0"/>
-          </a:p>
-          <a:p>
-            <a:pPr algn="l" indent="0" marL="0">
-              <a:buNone/>
-            </a:pPr>
-            <a:r>
-              <a:rPr lang="en-US" sz="2000" i="1" dirty="0">
+              <a:rPr lang="en-US" sz="3400" b="1" dirty="0">
+                <a:solidFill>
+                  <a:srgbClr val="0D1B4B"/>
+                </a:solidFill>
+              </a:rPr>
+              <a:t>Σⱼₖ (Σᵢ xᵢⱼₖ − 1)²  —  </a:t>
+            </a:r>
+            <a:pPr algn="l" indent="0" marL="0">
+              <a:buNone/>
+            </a:pPr>
+            <a:r>
+              <a:rPr lang="en-US" sz="2400" i="1" dirty="0">
                 <a:solidFill>
                   <a:srgbClr val="3D4F60"/>
                 </a:solidFill>
               </a:rPr>
               <a:t>each digit appears once per column</a:t>
             </a:r>
-            <a:endParaRPr lang="en-US" sz="2200" dirty="0"/>
+            <a:endParaRPr lang="en-US" sz="3400" dirty="0"/>
           </a:p>
         </p:txBody>
       </p:sp>
@@ -2182,8 +2170,8 @@
         </p:nvSpPr>
         <p:spPr>
           <a:xfrm>
-            <a:off x="731520" y="20875752"/>
-            <a:ext cx="2468880" cy="1207008"/>
+            <a:off x="731520" y="21378672"/>
+            <a:ext cx="2468880" cy="1335024"/>
           </a:xfrm>
           <a:prstGeom prst="rect">
             <a:avLst/>
@@ -2207,8 +2195,8 @@
         </p:nvSpPr>
         <p:spPr>
           <a:xfrm>
-            <a:off x="731520" y="20875752"/>
-            <a:ext cx="2468880" cy="1207008"/>
+            <a:off x="731520" y="21378672"/>
+            <a:ext cx="2468880" cy="1335024"/>
           </a:xfrm>
           <a:prstGeom prst="rect">
             <a:avLst/>
@@ -2224,14 +2212,14 @@
               <a:buNone/>
             </a:pPr>
             <a:r>
-              <a:rPr lang="en-US" sz="2200" b="1" dirty="0">
+              <a:rPr lang="en-US" sz="2400" b="1" dirty="0">
                 <a:solidFill>
                   <a:srgbClr val="FFFFFF"/>
                 </a:solidFill>
               </a:rPr>
               <a:t>E₄  Box</a:t>
             </a:r>
-            <a:endParaRPr lang="en-US" sz="2200" dirty="0"/>
+            <a:endParaRPr lang="en-US" sz="2400" dirty="0"/>
           </a:p>
         </p:txBody>
       </p:sp>
@@ -2243,8 +2231,8 @@
         </p:nvSpPr>
         <p:spPr>
           <a:xfrm>
-            <a:off x="3218688" y="20875752"/>
-            <a:ext cx="9034272" cy="1207008"/>
+            <a:off x="3218688" y="21378672"/>
+            <a:ext cx="9034272" cy="1335024"/>
           </a:xfrm>
           <a:prstGeom prst="rect">
             <a:avLst/>
@@ -2268,8 +2256,8 @@
         </p:nvSpPr>
         <p:spPr>
           <a:xfrm>
-            <a:off x="3383280" y="20875752"/>
-            <a:ext cx="8851392" cy="1207008"/>
+            <a:off x="3383280" y="21378672"/>
+            <a:ext cx="8851392" cy="1335024"/>
           </a:xfrm>
           <a:prstGeom prst="rect">
             <a:avLst/>
@@ -2285,29 +2273,25 @@
               <a:buNone/>
             </a:pPr>
             <a:r>
-              <a:rPr lang="en-US" sz="2200" b="1" dirty="0">
-                <a:solidFill>
-                  <a:srgbClr val="000000"/>
-                </a:solidFill>
-              </a:rPr>
-              <a:t>Σʙₒˣ,ₖ (Σ₍ᵢ,ⱼ₎∈ʙₒˣ xᵢⱼₖ − 1)²
-</a:t>
-            </a:r>
-            <a:endParaRPr lang="en-US" sz="2200" dirty="0"/>
-          </a:p>
-          <a:p>
-            <a:pPr algn="l" indent="0" marL="0">
-              <a:buNone/>
-            </a:pPr>
-            <a:r>
-              <a:rPr lang="en-US" sz="2000" i="1" dirty="0">
+              <a:rPr lang="en-US" sz="3400" b="1" dirty="0">
+                <a:solidFill>
+                  <a:srgbClr val="0D1B4B"/>
+                </a:solidFill>
+              </a:rPr>
+              <a:t>Σʙₒˣ,ₖ (Σ₍ᵢ,ⱼ₎∈ʙₒˣ xᵢⱼₖ − 1)²  —  </a:t>
+            </a:r>
+            <a:pPr algn="l" indent="0" marL="0">
+              <a:buNone/>
+            </a:pPr>
+            <a:r>
+              <a:rPr lang="en-US" sz="2400" i="1" dirty="0">
                 <a:solidFill>
                   <a:srgbClr val="3D4F60"/>
                 </a:solidFill>
               </a:rPr>
               <a:t>each digit appears once per √N×√N box</a:t>
             </a:r>
-            <a:endParaRPr lang="en-US" sz="2200" dirty="0"/>
+            <a:endParaRPr lang="en-US" sz="3400" dirty="0"/>
           </a:p>
         </p:txBody>
       </p:sp>
@@ -2319,7 +2303,7 @@
         </p:nvSpPr>
         <p:spPr>
           <a:xfrm>
-            <a:off x="731520" y="22265640"/>
+            <a:off x="731520" y="22933152"/>
             <a:ext cx="11521440" cy="1115568"/>
           </a:xfrm>
           <a:prstGeom prst="rect">
@@ -2344,7 +2328,7 @@
         </p:nvSpPr>
         <p:spPr>
           <a:xfrm>
-            <a:off x="868680" y="22265640"/>
+            <a:off x="868680" y="22933152"/>
             <a:ext cx="11338560" cy="1115568"/>
           </a:xfrm>
           <a:prstGeom prst="rect">
@@ -2421,7 +2405,7 @@
                   <a:srgbClr val="FFFFFF"/>
                 </a:solidFill>
               </a:rPr>
-              <a:t> 459×459 Q (30 givens eliminated) · 90.6% sparse</a:t>
+              <a:t> 459×459 Q (30 givens eliminated) · ≤28 non-zero off-diagonals per variable</a:t>
             </a:r>
             <a:endParaRPr lang="en-US" sz="2100" dirty="0"/>
           </a:p>
@@ -2435,7 +2419,7 @@
         </p:nvSpPr>
         <p:spPr>
           <a:xfrm>
-            <a:off x="731520" y="23454360"/>
+            <a:off x="731520" y="24121872"/>
             <a:ext cx="11521440" cy="347472"/>
           </a:xfrm>
           <a:prstGeom prst="rect">
@@ -2471,8 +2455,8 @@
         </p:nvSpPr>
         <p:spPr>
           <a:xfrm>
-            <a:off x="548640" y="24003000"/>
-            <a:ext cx="11887200" cy="7315200"/>
+            <a:off x="548640" y="24917400"/>
+            <a:ext cx="11887200" cy="6400800"/>
           </a:xfrm>
           <a:prstGeom prst="rect">
             <a:avLst/>
@@ -2496,7 +2480,7 @@
         </p:nvSpPr>
         <p:spPr>
           <a:xfrm>
-            <a:off x="548640" y="24003000"/>
+            <a:off x="548640" y="24917400"/>
             <a:ext cx="11887200" cy="566928"/>
           </a:xfrm>
           <a:prstGeom prst="rect">
@@ -2521,7 +2505,7 @@
         </p:nvSpPr>
         <p:spPr>
           <a:xfrm>
-            <a:off x="713232" y="24003000"/>
+            <a:off x="713232" y="24917400"/>
             <a:ext cx="11704320" cy="566928"/>
           </a:xfrm>
           <a:prstGeom prst="rect">
@@ -2565,8 +2549,8 @@
         </p:blipFill>
         <p:spPr>
           <a:xfrm>
-            <a:off x="846645" y="24688800"/>
-            <a:ext cx="11291190" cy="6428232"/>
+            <a:off x="1649717" y="25603200"/>
+            <a:ext cx="9685046" cy="5513832"/>
           </a:xfrm>
           <a:prstGeom prst="rect">
             <a:avLst/>
@@ -2669,13 +2653,14 @@
         </p:nvPicPr>
         <p:blipFill>
           <a:blip r:embed="rId2"/>
-          <a:srcRect l="-1000" r="-1000" t="0" b="0"/>
-          <a:stretch/>
+          <a:stretch>
+            <a:fillRect/>
+          </a:stretch>
         </p:blipFill>
         <p:spPr>
           <a:xfrm>
-            <a:off x="20071080" y="4919472"/>
-            <a:ext cx="4663440" cy="4572000"/>
+            <a:off x="18105120" y="5221224"/>
+            <a:ext cx="6583680" cy="4370832"/>
           </a:xfrm>
           <a:prstGeom prst="rect">
             <a:avLst/>
@@ -2690,8 +2675,8 @@
         </p:nvSpPr>
         <p:spPr>
           <a:xfrm>
-            <a:off x="20071080" y="9528048"/>
-            <a:ext cx="4663440" cy="347472"/>
+            <a:off x="18105120" y="9683496"/>
+            <a:ext cx="6583680" cy="347472"/>
           </a:xfrm>
           <a:prstGeom prst="rect">
             <a:avLst/>
@@ -2726,8 +2711,8 @@
         </p:nvSpPr>
         <p:spPr>
           <a:xfrm>
-            <a:off x="13213080" y="4864608"/>
-            <a:ext cx="6675120" cy="5623560"/>
+            <a:off x="13213080" y="4709160"/>
+            <a:ext cx="4754880" cy="5623560"/>
           </a:xfrm>
           <a:prstGeom prst="rect">
             <a:avLst/>
@@ -2743,22 +2728,21 @@
               <a:buNone/>
             </a:pPr>
             <a:r>
-              <a:rPr lang="en-US" sz="2400" b="1" dirty="0">
+              <a:rPr lang="en-US" sz="2200" b="1" dirty="0">
                 <a:solidFill>
                   <a:srgbClr val="000000"/>
                 </a:solidFill>
               </a:rPr>
-              <a:t>Solvers Evaluated
-</a:t>
-            </a:r>
-            <a:endParaRPr lang="en-US" sz="2400" dirty="0"/>
-          </a:p>
-          <a:p>
-            <a:pPr algn="l" indent="0" marL="0">
-              <a:buNone/>
-            </a:pPr>
-            <a:r>
-              <a:rPr lang="en-US" sz="2100" dirty="0">
+              <a:t>Solvers Evaluated</a:t>
+            </a:r>
+            <a:endParaRPr lang="en-US" sz="2200" dirty="0"/>
+          </a:p>
+          <a:p>
+            <a:pPr algn="l" indent="0" marL="0">
+              <a:buNone/>
+            </a:pPr>
+            <a:r>
+              <a:rPr lang="en-US" sz="1900" dirty="0">
                 <a:solidFill>
                   <a:srgbClr val="000000"/>
                 </a:solidFill>
@@ -2767,14 +2751,14 @@
   100 reads, 1000 sweeps
 </a:t>
             </a:r>
-            <a:endParaRPr lang="en-US" sz="2400" dirty="0"/>
-          </a:p>
-          <a:p>
-            <a:pPr algn="l" indent="0" marL="0">
-              <a:buNone/>
-            </a:pPr>
-            <a:r>
-              <a:rPr lang="en-US" sz="2100" dirty="0">
+            <a:endParaRPr lang="en-US" sz="2200" dirty="0"/>
+          </a:p>
+          <a:p>
+            <a:pPr algn="l" indent="0" marL="0">
+              <a:buNone/>
+            </a:pPr>
+            <a:r>
+              <a:rPr lang="en-US" sz="1900" dirty="0">
                 <a:solidFill>
                   <a:srgbClr val="000000"/>
                 </a:solidFill>
@@ -2783,14 +2767,14 @@
   9-second time limit
 </a:t>
             </a:r>
-            <a:endParaRPr lang="en-US" sz="2400" dirty="0"/>
-          </a:p>
-          <a:p>
-            <a:pPr algn="l" indent="0" marL="0">
-              <a:buNone/>
-            </a:pPr>
-            <a:r>
-              <a:rPr lang="en-US" sz="2100" dirty="0">
+            <a:endParaRPr lang="en-US" sz="2200" dirty="0"/>
+          </a:p>
+          <a:p>
+            <a:pPr algn="l" indent="0" marL="0">
+              <a:buNone/>
+            </a:pPr>
+            <a:r>
+              <a:rPr lang="en-US" sz="1900" dirty="0">
                 <a:solidFill>
                   <a:srgbClr val="000000"/>
                 </a:solidFill>
@@ -2799,14 +2783,14 @@
   1,000 reads · 200 µs · forward annealing
 </a:t>
             </a:r>
-            <a:endParaRPr lang="en-US" sz="2400" dirty="0"/>
-          </a:p>
-          <a:p>
-            <a:pPr algn="l" indent="0" marL="0">
-              <a:buNone/>
-            </a:pPr>
-            <a:r>
-              <a:rPr lang="en-US" sz="2100" dirty="0">
+            <a:endParaRPr lang="en-US" sz="2200" dirty="0"/>
+          </a:p>
+          <a:p>
+            <a:pPr algn="l" indent="0" marL="0">
+              <a:buNone/>
+            </a:pPr>
+            <a:r>
+              <a:rPr lang="en-US" sz="1900" dirty="0">
                 <a:solidFill>
                   <a:srgbClr val="000000"/>
                 </a:solidFill>
@@ -2815,81 +2799,50 @@
   p=2, 2048 shots, COBYLA
 </a:t>
             </a:r>
-            <a:endParaRPr lang="en-US" sz="2400" dirty="0"/>
-          </a:p>
-          <a:p>
-            <a:pPr algn="l" indent="0" marL="0">
-              <a:buNone/>
-            </a:pPr>
-            <a:r>
-              <a:rPr lang="en-US" sz="2400" b="1" dirty="0">
+            <a:endParaRPr lang="en-US" sz="2200" dirty="0"/>
+          </a:p>
+          <a:p>
+            <a:pPr algn="l" indent="0" marL="0">
+              <a:buNone/>
+            </a:pPr>
+            <a:r>
+              <a:rPr lang="en-US" sz="2200" b="1" dirty="0">
                 <a:solidFill>
                   <a:srgbClr val="000000"/>
                 </a:solidFill>
               </a:rPr>
-              <a:t>Test Cases
+              <a:t>Test Instances</a:t>
+            </a:r>
+            <a:endParaRPr lang="en-US" sz="2200" dirty="0"/>
+          </a:p>
+          <a:p>
+            <a:pPr algn="l" indent="0" marL="0">
+              <a:buNone/>
+            </a:pPr>
+            <a:r>
+              <a:rPr lang="en-US" sz="1900" dirty="0">
+                <a:solidFill>
+                  <a:srgbClr val="000000"/>
+                </a:solidFill>
+              </a:rPr>
+              <a:t>• 4×4 (no givens, 64 vars) — QUBO correctness baseline
 </a:t>
             </a:r>
-            <a:endParaRPr lang="en-US" sz="2400" dirty="0"/>
-          </a:p>
-          <a:p>
-            <a:pPr algn="l" indent="0" marL="0">
-              <a:buNone/>
-            </a:pPr>
-            <a:r>
-              <a:rPr lang="en-US" sz="2100" dirty="0">
+            <a:endParaRPr lang="en-US" sz="2200" dirty="0"/>
+          </a:p>
+          <a:p>
+            <a:pPr algn="l" indent="0" marL="0">
+              <a:buNone/>
+            </a:pPr>
+            <a:r>
+              <a:rPr lang="en-US" sz="1900" dirty="0">
                 <a:solidFill>
                   <a:srgbClr val="000000"/>
                 </a:solidFill>
               </a:rPr>
-              <a:t>• 4×4 blank — 64 vars
-</a:t>
-            </a:r>
-            <a:endParaRPr lang="en-US" sz="2400" dirty="0"/>
-          </a:p>
-          <a:p>
-            <a:pPr algn="l" indent="0" marL="0">
-              <a:buNone/>
-            </a:pPr>
-            <a:r>
-              <a:rPr lang="en-US" sz="2100" dirty="0">
-                <a:solidFill>
-                  <a:srgbClr val="000000"/>
-                </a:solidFill>
-              </a:rPr>
-              <a:t>• 9×9 Easy — 30 givens, 459 vars
-</a:t>
-            </a:r>
-            <a:endParaRPr lang="en-US" sz="2400" dirty="0"/>
-          </a:p>
-          <a:p>
-            <a:pPr algn="l" indent="0" marL="0">
-              <a:buNone/>
-            </a:pPr>
-            <a:r>
-              <a:rPr lang="en-US" sz="2100" dirty="0">
-                <a:solidFill>
-                  <a:srgbClr val="000000"/>
-                </a:solidFill>
-              </a:rPr>
-              <a:t>• 9×9 Medium — 25 givens, 504 vars
-</a:t>
-            </a:r>
-            <a:endParaRPr lang="en-US" sz="2400" dirty="0"/>
-          </a:p>
-          <a:p>
-            <a:pPr algn="l" indent="0" marL="0">
-              <a:buNone/>
-            </a:pPr>
-            <a:r>
-              <a:rPr lang="en-US" sz="2100" dirty="0">
-                <a:solidFill>
-                  <a:srgbClr val="000000"/>
-                </a:solidFill>
-              </a:rPr>
-              <a:t>• 9×9 Hard — 17 givens, 576 vars</a:t>
-            </a:r>
-            <a:endParaRPr lang="en-US" sz="2400" dirty="0"/>
+              <a:t>• 9×9 Easy→Hard: 30/25/17 givens → 459/504/576 free vars (17 = min unique)</a:t>
+            </a:r>
+            <a:endParaRPr lang="en-US" sz="2200" dirty="0"/>
           </a:p>
         </p:txBody>
       </p:sp>
@@ -2995,8 +2948,8 @@
         </p:blipFill>
         <p:spPr>
           <a:xfrm>
-            <a:off x="13139928" y="11672011"/>
-            <a:ext cx="11667744" cy="6950050"/>
+            <a:off x="13358522" y="11475720"/>
+            <a:ext cx="11230556" cy="7342632"/>
           </a:xfrm>
           <a:prstGeom prst="rect">
             <a:avLst/>
@@ -3012,7 +2965,7 @@
         <p:spPr>
           <a:xfrm>
             <a:off x="13030200" y="19202400"/>
-            <a:ext cx="11887200" cy="5029200"/>
+            <a:ext cx="11887200" cy="12115800"/>
           </a:xfrm>
           <a:prstGeom prst="rect">
             <a:avLst/>
@@ -3083,7 +3036,7 @@
                   <a:srgbClr val="FFFFFF"/>
                 </a:solidFill>
               </a:rPr>
-              <a:t>RESULTS: D-WAVE QPU VS. SIMULATED ANNEALING</a:t>
+              <a:t>VARIABLE REDUCTION VIA GIVEN-CELL ELIMINATION</a:t>
             </a:r>
             <a:endParaRPr lang="en-US" sz="2600" dirty="0"/>
           </a:p>
@@ -3091,7 +3044,7 @@
       </p:sp>
       <p:pic>
         <p:nvPicPr>
-          <p:cNvPr id="61" name="Image 3" descr="figures/vectorized/fig5_cropped.png">    </p:cNvPr>
+          <p:cNvPr id="61" name="Image 3" descr="figures/vectorized/fig3_cropped.png">    </p:cNvPr>
           <p:cNvPicPr>
             <a:picLocks noChangeAspect="1"/>
           </p:cNvPicPr>
@@ -3105,8 +3058,8 @@
         </p:blipFill>
         <p:spPr>
           <a:xfrm>
-            <a:off x="13139928" y="19985346"/>
-            <a:ext cx="11667744" cy="3947941"/>
+            <a:off x="13139928" y="20855223"/>
+            <a:ext cx="11667744" cy="9294785"/>
           </a:xfrm>
           <a:prstGeom prst="rect">
             <a:avLst/>
@@ -3121,8 +3074,8 @@
         </p:nvSpPr>
         <p:spPr>
           <a:xfrm>
-            <a:off x="13030200" y="24414480"/>
-            <a:ext cx="11887200" cy="6903720"/>
+            <a:off x="25511760" y="4206240"/>
+            <a:ext cx="11887200" cy="5029200"/>
           </a:xfrm>
           <a:prstGeom prst="rect">
             <a:avLst/>
@@ -3146,7 +3099,7 @@
         </p:nvSpPr>
         <p:spPr>
           <a:xfrm>
-            <a:off x="13030200" y="24414480"/>
+            <a:off x="25511760" y="4206240"/>
             <a:ext cx="11887200" cy="566928"/>
           </a:xfrm>
           <a:prstGeom prst="rect">
@@ -3171,7 +3124,7 @@
         </p:nvSpPr>
         <p:spPr>
           <a:xfrm>
-            <a:off x="13194792" y="24414480"/>
+            <a:off x="25676352" y="4206240"/>
             <a:ext cx="11704320" cy="566928"/>
           </a:xfrm>
           <a:prstGeom prst="rect">
@@ -3193,7 +3146,7 @@
                   <a:srgbClr val="FFFFFF"/>
                 </a:solidFill>
               </a:rPr>
-              <a:t>VARIABLE REDUCTION VIA GIVEN-CELL ELIMINATION</a:t>
+              <a:t>RESULTS: D-WAVE QPU VS. SIMULATED ANNEALING</a:t>
             </a:r>
             <a:endParaRPr lang="en-US" sz="2600" dirty="0"/>
           </a:p>
@@ -3201,7 +3154,7 @@
       </p:sp>
       <p:pic>
         <p:nvPicPr>
-          <p:cNvPr id="65" name="Image 4" descr="figures/vectorized/fig3_cropped.png">    </p:cNvPr>
+          <p:cNvPr id="65" name="Image 4" descr="figures/vectorized/fig5_cropped.png">    </p:cNvPr>
           <p:cNvPicPr>
             <a:picLocks noChangeAspect="1"/>
           </p:cNvPicPr>
@@ -3215,8 +3168,8 @@
         </p:blipFill>
         <p:spPr>
           <a:xfrm>
-            <a:off x="15197386" y="25100280"/>
-            <a:ext cx="7552829" cy="6016752"/>
+            <a:off x="25621488" y="4989186"/>
+            <a:ext cx="11667744" cy="3947941"/>
           </a:xfrm>
           <a:prstGeom prst="rect">
             <a:avLst/>
@@ -3231,8 +3184,8 @@
         </p:nvSpPr>
         <p:spPr>
           <a:xfrm>
-            <a:off x="25511760" y="4206240"/>
-            <a:ext cx="11887200" cy="10972800"/>
+            <a:off x="25511760" y="9418320"/>
+            <a:ext cx="11887200" cy="9144000"/>
           </a:xfrm>
           <a:prstGeom prst="rect">
             <a:avLst/>
@@ -3256,7 +3209,7 @@
         </p:nvSpPr>
         <p:spPr>
           <a:xfrm>
-            <a:off x="25511760" y="4206240"/>
+            <a:off x="25511760" y="9418320"/>
             <a:ext cx="11887200" cy="566928"/>
           </a:xfrm>
           <a:prstGeom prst="rect">
@@ -3281,7 +3234,7 @@
         </p:nvSpPr>
         <p:spPr>
           <a:xfrm>
-            <a:off x="25676352" y="4206240"/>
+            <a:off x="25676352" y="9418320"/>
             <a:ext cx="11704320" cy="566928"/>
           </a:xfrm>
           <a:prstGeom prst="rect">
@@ -3325,8 +3278,8 @@
         </p:blipFill>
         <p:spPr>
           <a:xfrm>
-            <a:off x="26034225" y="4892040"/>
-            <a:ext cx="10842269" cy="10085832"/>
+            <a:off x="27017205" y="10104120"/>
+            <a:ext cx="8876309" cy="8257032"/>
           </a:xfrm>
           <a:prstGeom prst="rect">
             <a:avLst/>
@@ -3341,8 +3294,8 @@
         </p:nvSpPr>
         <p:spPr>
           <a:xfrm>
-            <a:off x="25511760" y="15361920"/>
-            <a:ext cx="11887200" cy="5943600"/>
+            <a:off x="25511760" y="18745200"/>
+            <a:ext cx="11887200" cy="4572000"/>
           </a:xfrm>
           <a:prstGeom prst="rect">
             <a:avLst/>
@@ -3366,7 +3319,7 @@
         </p:nvSpPr>
         <p:spPr>
           <a:xfrm>
-            <a:off x="25511760" y="15361920"/>
+            <a:off x="25511760" y="18745200"/>
             <a:ext cx="11887200" cy="566928"/>
           </a:xfrm>
           <a:prstGeom prst="rect">
@@ -3391,7 +3344,7 @@
         </p:nvSpPr>
         <p:spPr>
           <a:xfrm>
-            <a:off x="25676352" y="15361920"/>
+            <a:off x="25676352" y="18745200"/>
             <a:ext cx="11704320" cy="566928"/>
           </a:xfrm>
           <a:prstGeom prst="rect">
@@ -3427,8 +3380,8 @@
         </p:nvSpPr>
         <p:spPr>
           <a:xfrm>
-            <a:off x="25712928" y="16020288"/>
-            <a:ext cx="502920" cy="868680"/>
+            <a:off x="25712928" y="19403568"/>
+            <a:ext cx="502920" cy="764438"/>
           </a:xfrm>
           <a:prstGeom prst="rect">
             <a:avLst/>
@@ -3444,14 +3397,14 @@
               <a:buNone/>
             </a:pPr>
             <a:r>
-              <a:rPr lang="en-US" sz="2600" dirty="0">
+              <a:rPr lang="en-US" sz="2200" dirty="0">
                 <a:solidFill>
                   <a:srgbClr val="1A7A3C"/>
                 </a:solidFill>
               </a:rPr>
               <a:t>✅</a:t>
             </a:r>
-            <a:endParaRPr lang="en-US" sz="2600" dirty="0"/>
+            <a:endParaRPr lang="en-US" sz="2200" dirty="0"/>
           </a:p>
         </p:txBody>
       </p:sp>
@@ -3463,8 +3416,8 @@
         </p:nvSpPr>
         <p:spPr>
           <a:xfrm>
-            <a:off x="26261568" y="16020288"/>
-            <a:ext cx="10927080" cy="868680"/>
+            <a:off x="26261568" y="19403568"/>
+            <a:ext cx="10927080" cy="764438"/>
           </a:xfrm>
           <a:prstGeom prst="rect">
             <a:avLst/>
@@ -3480,14 +3433,14 @@
               <a:buNone/>
             </a:pPr>
             <a:r>
-              <a:rPr lang="en-US" sz="2000" dirty="0">
+              <a:rPr lang="en-US" sz="1800" dirty="0">
                 <a:solidFill>
                   <a:srgbClr val="1A202C"/>
                 </a:solidFill>
               </a:rPr>
-              <a:t>SA: 99% success on 4×4 (64 vars) but 6%/0%/0% on 9×9 Easy/Medium/Hard — a 14× variable-density increase collapses classical performance.</a:t>
-            </a:r>
-            <a:endParaRPr lang="en-US" sz="2000" dirty="0"/>
+              <a:t>SA degrades sharply with scale: 99% on blank 4×4 (64 vars) → 7% on 9×9 Easy (459 vars) — same constraint structure, 7× more variables, 14× lower success.</a:t>
+            </a:r>
+            <a:endParaRPr lang="en-US" sz="1800" dirty="0"/>
           </a:p>
         </p:txBody>
       </p:sp>
@@ -3499,8 +3452,8 @@
         </p:nvSpPr>
         <p:spPr>
           <a:xfrm>
-            <a:off x="25712928" y="17026128"/>
-            <a:ext cx="502920" cy="868680"/>
+            <a:off x="25712928" y="20168006"/>
+            <a:ext cx="502920" cy="764438"/>
           </a:xfrm>
           <a:prstGeom prst="rect">
             <a:avLst/>
@@ -3516,14 +3469,14 @@
               <a:buNone/>
             </a:pPr>
             <a:r>
-              <a:rPr lang="en-US" sz="2600" dirty="0">
+              <a:rPr lang="en-US" sz="2200" dirty="0">
                 <a:solidFill>
                   <a:srgbClr val="0077A8"/>
                 </a:solidFill>
               </a:rPr>
               <a:t>⚡</a:t>
             </a:r>
-            <a:endParaRPr lang="en-US" sz="2600" dirty="0"/>
+            <a:endParaRPr lang="en-US" sz="2200" dirty="0"/>
           </a:p>
         </p:txBody>
       </p:sp>
@@ -3535,8 +3488,8 @@
         </p:nvSpPr>
         <p:spPr>
           <a:xfrm>
-            <a:off x="26261568" y="17026128"/>
-            <a:ext cx="10927080" cy="868680"/>
+            <a:off x="26261568" y="20168006"/>
+            <a:ext cx="10927080" cy="764438"/>
           </a:xfrm>
           <a:prstGeom prst="rect">
             <a:avLst/>
@@ -3552,14 +3505,14 @@
               <a:buNone/>
             </a:pPr>
             <a:r>
-              <a:rPr lang="en-US" sz="2000" dirty="0">
+              <a:rPr lang="en-US" sz="1800" dirty="0">
                 <a:solidFill>
                   <a:srgbClr val="1A202C"/>
                 </a:solidFill>
               </a:rPr>
-              <a:t>Quantum tunneling advantage confirmed: D-Wave Hybrid solved Medium where all 100 SA runs failed, achieving E = 0 on a single attempt.</a:t>
-            </a:r>
-            <a:endParaRPr lang="en-US" sz="2000" dirty="0"/>
+              <a:t>QPU on 4×4: 100% Easy · 99.4% Medium · 76.1% ± 12.7% Hard — confirms the QUBO formulation produces valid Sudoku solutions on real quantum hardware.</a:t>
+            </a:r>
+            <a:endParaRPr lang="en-US" sz="1800" dirty="0"/>
           </a:p>
         </p:txBody>
       </p:sp>
@@ -3571,8 +3524,8 @@
         </p:nvSpPr>
         <p:spPr>
           <a:xfrm>
-            <a:off x="25712928" y="18031968"/>
-            <a:ext cx="502920" cy="868680"/>
+            <a:off x="25712928" y="20932445"/>
+            <a:ext cx="502920" cy="764438"/>
           </a:xfrm>
           <a:prstGeom prst="rect">
             <a:avLst/>
@@ -3588,27 +3541,99 @@
               <a:buNone/>
             </a:pPr>
             <a:r>
-              <a:rPr lang="en-US" sz="2600" dirty="0">
+              <a:rPr lang="en-US" sz="2200" dirty="0">
+                <a:solidFill>
+                  <a:srgbClr val="C0392B"/>
+                </a:solidFill>
+              </a:rPr>
+              <a:t>⚠</a:t>
+            </a:r>
+            <a:endParaRPr lang="en-US" sz="2200" dirty="0"/>
+          </a:p>
+        </p:txBody>
+      </p:sp>
+      <p:sp>
+        <p:nvSpPr>
+          <p:cNvPr id="78" name="Text 70"/>
+          <p:cNvSpPr/>
+          <p:nvPr/>
+        </p:nvSpPr>
+        <p:spPr>
+          <a:xfrm>
+            <a:off x="26261568" y="20932445"/>
+            <a:ext cx="10927080" cy="764438"/>
+          </a:xfrm>
+          <a:prstGeom prst="rect">
+            <a:avLst/>
+          </a:prstGeom>
+          <a:noFill/>
+          <a:ln/>
+        </p:spPr>
+        <p:txBody>
+          <a:bodyPr wrap="square" lIns="0" tIns="0" rIns="0" bIns="0" rtlCol="0" anchor="ctr"/>
+          <a:lstStyle/>
+          <a:p>
+            <a:pPr algn="l" indent="0" marL="0">
+              <a:buNone/>
+            </a:pPr>
+            <a:r>
+              <a:rPr lang="en-US" sz="1800" dirty="0">
+                <a:solidFill>
+                  <a:srgbClr val="1A202C"/>
+                </a:solidFill>
+              </a:rPr>
+              <a:t>SA outperforms QPU on 4×4 Hard (100% vs. 76.1%) — QPU struggles on the densest constraint instances even at small scale.</a:t>
+            </a:r>
+            <a:endParaRPr lang="en-US" sz="1800" dirty="0"/>
+          </a:p>
+        </p:txBody>
+      </p:sp>
+      <p:sp>
+        <p:nvSpPr>
+          <p:cNvPr id="79" name="Text 71"/>
+          <p:cNvSpPr/>
+          <p:nvPr/>
+        </p:nvSpPr>
+        <p:spPr>
+          <a:xfrm>
+            <a:off x="25712928" y="21696883"/>
+            <a:ext cx="502920" cy="764438"/>
+          </a:xfrm>
+          <a:prstGeom prst="rect">
+            <a:avLst/>
+          </a:prstGeom>
+          <a:noFill/>
+          <a:ln/>
+        </p:spPr>
+        <p:txBody>
+          <a:bodyPr wrap="square" lIns="0" tIns="0" rIns="0" bIns="0" rtlCol="0" anchor="ctr"/>
+          <a:lstStyle/>
+          <a:p>
+            <a:pPr algn="ctr" indent="0" marL="0">
+              <a:buNone/>
+            </a:pPr>
+            <a:r>
+              <a:rPr lang="en-US" sz="2200" dirty="0">
                 <a:solidFill>
                   <a:srgbClr val="0077A8"/>
                 </a:solidFill>
               </a:rPr>
               <a:t>✔</a:t>
             </a:r>
-            <a:endParaRPr lang="en-US" sz="2600" dirty="0"/>
-          </a:p>
-        </p:txBody>
-      </p:sp>
-      <p:sp>
-        <p:nvSpPr>
-          <p:cNvPr id="78" name="Text 70"/>
-          <p:cNvSpPr/>
-          <p:nvPr/>
-        </p:nvSpPr>
-        <p:spPr>
-          <a:xfrm>
-            <a:off x="26261568" y="18031968"/>
-            <a:ext cx="10927080" cy="868680"/>
+            <a:endParaRPr lang="en-US" sz="2200" dirty="0"/>
+          </a:p>
+        </p:txBody>
+      </p:sp>
+      <p:sp>
+        <p:nvSpPr>
+          <p:cNvPr id="80" name="Text 72"/>
+          <p:cNvSpPr/>
+          <p:nvPr/>
+        </p:nvSpPr>
+        <p:spPr>
+          <a:xfrm>
+            <a:off x="26261568" y="21696883"/>
+            <a:ext cx="10927080" cy="764438"/>
           </a:xfrm>
           <a:prstGeom prst="rect">
             <a:avLst/>
@@ -3624,27 +3649,27 @@
               <a:buNone/>
             </a:pPr>
             <a:r>
-              <a:rPr lang="en-US" sz="2000" dirty="0">
+              <a:rPr lang="en-US" sz="1800" dirty="0">
                 <a:solidFill>
                   <a:srgbClr val="1A202C"/>
                 </a:solidFill>
               </a:rPr>
-              <a:t>Advantage2 QPU: 100% on Easy · 99.4% on Medium · 76.1% ± 12.7% on Hard — embedding complexity limits hard instances.</a:t>
-            </a:r>
-            <a:endParaRPr lang="en-US" sz="2000" dirty="0"/>
-          </a:p>
-        </p:txBody>
-      </p:sp>
-      <p:sp>
-        <p:nvSpPr>
-          <p:cNvPr id="79" name="Text 71"/>
-          <p:cNvSpPr/>
-          <p:nvPr/>
-        </p:nvSpPr>
-        <p:spPr>
-          <a:xfrm>
-            <a:off x="25712928" y="19037808"/>
-            <a:ext cx="502920" cy="868680"/>
+              <a:t>Chain breaks: 0% on all 12 QPU experiments — the Pegasus topology embeds 4×4 Sudoku cleanly; Hard failures are an annealing quality issue, not a connectivity issue.</a:t>
+            </a:r>
+            <a:endParaRPr lang="en-US" sz="1800" dirty="0"/>
+          </a:p>
+        </p:txBody>
+      </p:sp>
+      <p:sp>
+        <p:nvSpPr>
+          <p:cNvPr id="81" name="Text 73"/>
+          <p:cNvSpPr/>
+          <p:nvPr/>
+        </p:nvSpPr>
+        <p:spPr>
+          <a:xfrm>
+            <a:off x="25712928" y="22461322"/>
+            <a:ext cx="502920" cy="764438"/>
           </a:xfrm>
           <a:prstGeom prst="rect">
             <a:avLst/>
@@ -3660,27 +3685,27 @@
               <a:buNone/>
             </a:pPr>
             <a:r>
-              <a:rPr lang="en-US" sz="2600" dirty="0">
-                <a:solidFill>
-                  <a:srgbClr val="C0392B"/>
-                </a:solidFill>
-              </a:rPr>
-              <a:t>⚠</a:t>
-            </a:r>
-            <a:endParaRPr lang="en-US" sz="2600" dirty="0"/>
-          </a:p>
-        </p:txBody>
-      </p:sp>
-      <p:sp>
-        <p:nvSpPr>
-          <p:cNvPr id="80" name="Text 72"/>
-          <p:cNvSpPr/>
-          <p:nvPr/>
-        </p:nvSpPr>
-        <p:spPr>
-          <a:xfrm>
-            <a:off x="26261568" y="19037808"/>
-            <a:ext cx="10927080" cy="868680"/>
+              <a:rPr lang="en-US" sz="2200" dirty="0">
+                <a:solidFill>
+                  <a:srgbClr val="3D4F60"/>
+                </a:solidFill>
+              </a:rPr>
+              <a:t>⏱</a:t>
+            </a:r>
+            <a:endParaRPr lang="en-US" sz="2200" dirty="0"/>
+          </a:p>
+        </p:txBody>
+      </p:sp>
+      <p:sp>
+        <p:nvSpPr>
+          <p:cNvPr id="82" name="Text 74"/>
+          <p:cNvSpPr/>
+          <p:nvPr/>
+        </p:nvSpPr>
+        <p:spPr>
+          <a:xfrm>
+            <a:off x="26261568" y="22461322"/>
+            <a:ext cx="10927080" cy="764438"/>
           </a:xfrm>
           <a:prstGeom prst="rect">
             <a:avLst/>
@@ -3696,86 +3721,14 @@
               <a:buNone/>
             </a:pPr>
             <a:r>
-              <a:rPr lang="en-US" sz="2000" dirty="0">
+              <a:rPr lang="en-US" sz="1800" dirty="0">
                 <a:solidFill>
                   <a:srgbClr val="1A202C"/>
                 </a:solidFill>
               </a:rPr>
-              <a:t>Both solvers failed on 17-clue Sudoku (E = 4): extreme constraint sparsity creates energy landscapes beyond current hardware.</a:t>
-            </a:r>
-            <a:endParaRPr lang="en-US" sz="2000" dirty="0"/>
-          </a:p>
-        </p:txBody>
-      </p:sp>
-      <p:sp>
-        <p:nvSpPr>
-          <p:cNvPr id="81" name="Text 73"/>
-          <p:cNvSpPr/>
-          <p:nvPr/>
-        </p:nvSpPr>
-        <p:spPr>
-          <a:xfrm>
-            <a:off x="25712928" y="20043648"/>
-            <a:ext cx="502920" cy="868680"/>
-          </a:xfrm>
-          <a:prstGeom prst="rect">
-            <a:avLst/>
-          </a:prstGeom>
-          <a:noFill/>
-          <a:ln/>
-        </p:spPr>
-        <p:txBody>
-          <a:bodyPr wrap="square" lIns="0" tIns="0" rIns="0" bIns="0" rtlCol="0" anchor="ctr"/>
-          <a:lstStyle/>
-          <a:p>
-            <a:pPr algn="ctr" indent="0" marL="0">
-              <a:buNone/>
-            </a:pPr>
-            <a:r>
-              <a:rPr lang="en-US" sz="2600" dirty="0">
-                <a:solidFill>
-                  <a:srgbClr val="3D4F60"/>
-                </a:solidFill>
-              </a:rPr>
-              <a:t>⏱</a:t>
-            </a:r>
-            <a:endParaRPr lang="en-US" sz="2600" dirty="0"/>
-          </a:p>
-        </p:txBody>
-      </p:sp>
-      <p:sp>
-        <p:nvSpPr>
-          <p:cNvPr id="82" name="Text 74"/>
-          <p:cNvSpPr/>
-          <p:nvPr/>
-        </p:nvSpPr>
-        <p:spPr>
-          <a:xfrm>
-            <a:off x="26261568" y="20043648"/>
-            <a:ext cx="10927080" cy="868680"/>
-          </a:xfrm>
-          <a:prstGeom prst="rect">
-            <a:avLst/>
-          </a:prstGeom>
-          <a:noFill/>
-          <a:ln/>
-        </p:spPr>
-        <p:txBody>
-          <a:bodyPr wrap="square" lIns="0" tIns="0" rIns="0" bIns="0" rtlCol="0" anchor="ctr"/>
-          <a:lstStyle/>
-          <a:p>
-            <a:pPr algn="l" indent="0" marL="0">
-              <a:buNone/>
-            </a:pPr>
-            <a:r>
-              <a:rPr lang="en-US" sz="2000" dirty="0">
-                <a:solidFill>
-                  <a:srgbClr val="1A202C"/>
-                </a:solidFill>
-              </a:rPr>
-              <a:t>Hybrid averaged 1.72s vs. SA’s 1.96s — no quantum overhead penalty at this scale.</a:t>
-            </a:r>
-            <a:endParaRPr lang="en-US" sz="2000" dirty="0"/>
+              <a:t>QPU access time: 337–352 ms per experiment — hardware overhead is modest; bottleneck is solution quality, not speed.</a:t>
+            </a:r>
+            <a:endParaRPr lang="en-US" sz="1800" dirty="0"/>
           </a:p>
         </p:txBody>
       </p:sp>
@@ -3787,8 +3740,8 @@
         </p:nvSpPr>
         <p:spPr>
           <a:xfrm>
-            <a:off x="25511760" y="21488400"/>
-            <a:ext cx="11887200" cy="5669280"/>
+            <a:off x="25511760" y="23500080"/>
+            <a:ext cx="11887200" cy="3977640"/>
           </a:xfrm>
           <a:prstGeom prst="rect">
             <a:avLst/>
@@ -3812,7 +3765,7 @@
         </p:nvSpPr>
         <p:spPr>
           <a:xfrm>
-            <a:off x="25511760" y="21488400"/>
+            <a:off x="25511760" y="23500080"/>
             <a:ext cx="11887200" cy="566928"/>
           </a:xfrm>
           <a:prstGeom prst="rect">
@@ -3837,7 +3790,7 @@
         </p:nvSpPr>
         <p:spPr>
           <a:xfrm>
-            <a:off x="25676352" y="21488400"/>
+            <a:off x="25676352" y="23500080"/>
             <a:ext cx="11704320" cy="566928"/>
           </a:xfrm>
           <a:prstGeom prst="rect">
@@ -3873,8 +3826,8 @@
         </p:nvSpPr>
         <p:spPr>
           <a:xfrm>
-            <a:off x="25694640" y="22146768"/>
-            <a:ext cx="11567160" cy="4919472"/>
+            <a:off x="25694640" y="24158448"/>
+            <a:ext cx="11567160" cy="3227832"/>
           </a:xfrm>
           <a:prstGeom prst="rect">
             <a:avLst/>
@@ -3890,74 +3843,70 @@
               <a:buNone/>
             </a:pPr>
             <a:r>
-              <a:rPr lang="en-US" sz="2200" dirty="0">
+              <a:rPr lang="en-US" sz="2000" dirty="0">
                 <a:solidFill>
                   <a:srgbClr val="000000"/>
                 </a:solidFill>
               </a:rPr>
-              <a:t>• QUBO correctly encodes all four Sudoku constraints; E = 0 guarantees a valid solution.
-</a:t>
-            </a:r>
-            <a:endParaRPr lang="en-US" sz="2200" dirty="0"/>
-          </a:p>
-          <a:p>
-            <a:pPr algn="l" indent="0" marL="0">
-              <a:buNone/>
-            </a:pPr>
-            <a:r>
-              <a:rPr lang="en-US" sz="2200" dirty="0">
+              <a:t>• QUBO encoding is provably exact: E = 0 iff all four constraint types hold — validated on both 4×4 and 9×9.</a:t>
+            </a:r>
+            <a:endParaRPr lang="en-US" sz="2000" dirty="0"/>
+          </a:p>
+          <a:p>
+            <a:pPr algn="l" indent="0" marL="0">
+              <a:buNone/>
+            </a:pPr>
+            <a:r>
+              <a:rPr lang="en-US" sz="2000" dirty="0">
                 <a:solidFill>
                   <a:srgbClr val="000000"/>
                 </a:solidFill>
               </a:rPr>
-              <a:t>• D-Wave Hybrid BQM Solver solved 2/3 test puzzles vs. SA’s 1/3 — practical quantum advantage demonstrated.
-</a:t>
-            </a:r>
-            <a:endParaRPr lang="en-US" sz="2200" dirty="0"/>
-          </a:p>
-          <a:p>
-            <a:pPr algn="l" indent="0" marL="0">
-              <a:buNone/>
-            </a:pPr>
-            <a:r>
-              <a:rPr lang="en-US" sz="2200" dirty="0">
+              <a:t>• SA drops from 99% (4×4 blank) to 7% (9×9 Easy) with a 7× variable increase — classical annealing does not scale.</a:t>
+            </a:r>
+            <a:endParaRPr lang="en-US" sz="2000" dirty="0"/>
+          </a:p>
+          <a:p>
+            <a:pPr algn="l" indent="0" marL="0">
+              <a:buNone/>
+            </a:pPr>
+            <a:r>
+              <a:rPr lang="en-US" sz="2000" dirty="0">
                 <a:solidFill>
                   <a:srgbClr val="000000"/>
                 </a:solidFill>
               </a:rPr>
-              <a:t>• Advantage2 QPU matches SA on easy instances; embedding complexity limits harder ones.
-</a:t>
-            </a:r>
-            <a:endParaRPr lang="en-US" sz="2200" dirty="0"/>
-          </a:p>
-          <a:p>
-            <a:pPr algn="l" indent="0" marL="0">
-              <a:buNone/>
-            </a:pPr>
-            <a:r>
-              <a:rPr lang="en-US" sz="2200" dirty="0">
+              <a:t>• QPU finds valid Sudoku on real hardware: 100% Easy, 99.4% Medium, 76.1% Hard on 4×4 instances.</a:t>
+            </a:r>
+            <a:endParaRPr lang="en-US" sz="2000" dirty="0"/>
+          </a:p>
+          <a:p>
+            <a:pPr algn="l" indent="0" marL="0">
+              <a:buNone/>
+            </a:pPr>
+            <a:r>
+              <a:rPr lang="en-US" sz="2000" dirty="0">
                 <a:solidFill>
                   <a:srgbClr val="000000"/>
                 </a:solidFill>
               </a:rPr>
-              <a:t>• Given-cell elimination reduces 9×9 variables by 37% (729→459 free vars) — essential for feasible embedding.
-</a:t>
-            </a:r>
-            <a:endParaRPr lang="en-US" sz="2200" dirty="0"/>
-          </a:p>
-          <a:p>
-            <a:pPr algn="l" indent="0" marL="0">
-              <a:buNone/>
-            </a:pPr>
-            <a:r>
-              <a:rPr lang="en-US" sz="2200" dirty="0">
+              <a:t>• SA beats QPU on 4×4 Hard (100% vs. 76.1%) despite 0% chain breaks — energy landscape complexity is the bottleneck, not embedding.</a:t>
+            </a:r>
+            <a:endParaRPr lang="en-US" sz="2000" dirty="0"/>
+          </a:p>
+          <a:p>
+            <a:pPr algn="l" indent="0" marL="0">
+              <a:buNone/>
+            </a:pPr>
+            <a:r>
+              <a:rPr lang="en-US" sz="2000" dirty="0">
                 <a:solidFill>
                   <a:srgbClr val="000000"/>
                 </a:solidFill>
               </a:rPr>
-              <a:t>• Execution times competitive: hybrid 1.72s vs. SA 1.96s — quantum overhead is not a barrier.</a:t>
-            </a:r>
-            <a:endParaRPr lang="en-US" sz="2200" dirty="0"/>
+              <a:t>• Direct 9×9 QPU benchmarking remains open — 4×4 Hard results motivate annealing schedule and encoding improvements first.</a:t>
+            </a:r>
+            <a:endParaRPr lang="en-US" sz="2000" dirty="0"/>
           </a:p>
         </p:txBody>
       </p:sp>
@@ -3969,8 +3918,8 @@
         </p:nvSpPr>
         <p:spPr>
           <a:xfrm>
-            <a:off x="25511760" y="27340560"/>
-            <a:ext cx="11887200" cy="3977640"/>
+            <a:off x="25511760" y="27660600"/>
+            <a:ext cx="11887200" cy="3657600"/>
           </a:xfrm>
           <a:prstGeom prst="rect">
             <a:avLst/>
@@ -3994,7 +3943,7 @@
         </p:nvSpPr>
         <p:spPr>
           <a:xfrm>
-            <a:off x="25511760" y="27340560"/>
+            <a:off x="25511760" y="27660600"/>
             <a:ext cx="11887200" cy="566928"/>
           </a:xfrm>
           <a:prstGeom prst="rect">
@@ -4019,7 +3968,7 @@
         </p:nvSpPr>
         <p:spPr>
           <a:xfrm>
-            <a:off x="25676352" y="27340560"/>
+            <a:off x="25676352" y="27660600"/>
             <a:ext cx="11704320" cy="566928"/>
           </a:xfrm>
           <a:prstGeom prst="rect">
@@ -4055,8 +4004,8 @@
         </p:nvSpPr>
         <p:spPr>
           <a:xfrm>
-            <a:off x="25694640" y="27998928"/>
-            <a:ext cx="11567160" cy="3227832"/>
+            <a:off x="25694640" y="28318968"/>
+            <a:ext cx="11567160" cy="2907792"/>
           </a:xfrm>
           <a:prstGeom prst="rect">
             <a:avLst/>
@@ -4072,74 +4021,74 @@
               <a:buNone/>
             </a:pPr>
             <a:r>
-              <a:rPr lang="en-US" sz="2200" dirty="0">
+              <a:rPr lang="en-US" sz="2000" dirty="0">
                 <a:solidFill>
                   <a:srgbClr val="000000"/>
                 </a:solidFill>
               </a:rPr>
-              <a:t>• Penalty weight optimization per constraint type (λ₁…λ₄ tuning)
+              <a:t>• Per-constraint penalty tuning (λ₁…λ₄) to improve Hard-instance success rate
 </a:t>
             </a:r>
-            <a:endParaRPr lang="en-US" sz="2200" dirty="0"/>
-          </a:p>
-          <a:p>
-            <a:pPr algn="l" indent="0" marL="0">
-              <a:buNone/>
-            </a:pPr>
-            <a:r>
-              <a:rPr lang="en-US" sz="2200" dirty="0">
+            <a:endParaRPr lang="en-US" sz="2000" dirty="0"/>
+          </a:p>
+          <a:p>
+            <a:pPr algn="l" indent="0" marL="0">
+              <a:buNone/>
+            </a:pPr>
+            <a:r>
+              <a:rPr lang="en-US" sz="2000" dirty="0">
                 <a:solidFill>
                   <a:srgbClr val="000000"/>
                 </a:solidFill>
               </a:rPr>
-              <a:t>• Domain-wall encoding to further reduce variable count below one-hot
+              <a:t>• Alternative encoding (e.g. domain-wall) + embedding optimization to cut qubit count and chain breaks
 </a:t>
             </a:r>
-            <a:endParaRPr lang="en-US" sz="2200" dirty="0"/>
-          </a:p>
-          <a:p>
-            <a:pPr algn="l" indent="0" marL="0">
-              <a:buNone/>
-            </a:pPr>
-            <a:r>
-              <a:rPr lang="en-US" sz="2200" dirty="0">
+            <a:endParaRPr lang="en-US" sz="2000" dirty="0"/>
+          </a:p>
+          <a:p>
+            <a:pPr algn="l" indent="0" marL="0">
+              <a:buNone/>
+            </a:pPr>
+            <a:r>
+              <a:rPr lang="en-US" sz="2000" dirty="0">
                 <a:solidFill>
                   <a:srgbClr val="000000"/>
                 </a:solidFill>
               </a:rPr>
-              <a:t>• Direct Advantage QPU access for full 9×9 benchmarks
+              <a:t>• Direct Advantage2 QPU on full 9×9 without hybrid — pure annealing benchmark
 </a:t>
             </a:r>
-            <a:endParaRPr lang="en-US" sz="2200" dirty="0"/>
-          </a:p>
-          <a:p>
-            <a:pPr algn="l" indent="0" marL="0">
-              <a:buNone/>
-            </a:pPr>
-            <a:r>
-              <a:rPr lang="en-US" sz="2200" dirty="0">
+            <a:endParaRPr lang="en-US" sz="2000" dirty="0"/>
+          </a:p>
+          <a:p>
+            <a:pPr algn="l" indent="0" marL="0">
+              <a:buNone/>
+            </a:pPr>
+            <a:r>
+              <a:rPr lang="en-US" sz="2000" dirty="0">
                 <a:solidFill>
                   <a:srgbClr val="000000"/>
                 </a:solidFill>
               </a:rPr>
-              <a:t>• Systematic benchmarking across full puzzle difficulty distributions
+              <a:t>• Sweep full clue-count range (17–40) to map where the QPU’s solvability boundary lies
 </a:t>
             </a:r>
-            <a:endParaRPr lang="en-US" sz="2200" dirty="0"/>
-          </a:p>
-          <a:p>
-            <a:pPr algn="l" indent="0" marL="0">
-              <a:buNone/>
-            </a:pPr>
-            <a:r>
-              <a:rPr lang="en-US" sz="2200" dirty="0">
+            <a:endParaRPr lang="en-US" sz="2000" dirty="0"/>
+          </a:p>
+          <a:p>
+            <a:pPr algn="l" indent="0" marL="0">
+              <a:buNone/>
+            </a:pPr>
+            <a:r>
+              <a:rPr lang="en-US" sz="2000" dirty="0">
                 <a:solidFill>
                   <a:srgbClr val="000000"/>
                 </a:solidFill>
               </a:rPr>
-              <a:t>• Hybrid decomposition strategies for larger grid sizes (16×16 and beyond)</a:t>
-            </a:r>
-            <a:endParaRPr lang="en-US" sz="2200" dirty="0"/>
+              <a:t>• Scale to 16×16 Sudoku via hybrid quantum-classical decomposition</a:t>
+            </a:r>
+            <a:endParaRPr lang="en-US" sz="2000" dirty="0"/>
           </a:p>
         </p:txBody>
       </p:sp>
@@ -4256,8 +4205,8 @@
         </p:blipFill>
         <p:spPr>
           <a:xfrm>
-            <a:off x="36393120" y="31546800"/>
-            <a:ext cx="1737360" cy="1737360"/>
+            <a:off x="36850320" y="31546800"/>
+            <a:ext cx="1280160" cy="1280160"/>
           </a:xfrm>
           <a:prstGeom prst="rect">
             <a:avLst/>

--- a/quantum_sudoku_poster_v2.pptx
+++ b/quantum_sudoku_poster_v2.pptx
@@ -2405,7 +2405,7 @@
                   <a:srgbClr val="FFFFFF"/>
                 </a:solidFill>
               </a:rPr>
-              <a:t> 459×459 Q (30 givens eliminated) · ≤28 non-zero off-diagonals per variable</a:t>
+              <a:t> 459×459 Q (30 given cells eliminated = 270 vars) · ≤28 non-zero off-diagonals per variable</a:t>
             </a:r>
             <a:endParaRPr lang="en-US" sz="2100" dirty="0"/>
           </a:p>
@@ -2535,7 +2535,7 @@
       </p:sp>
       <p:pic>
         <p:nvPicPr>
-          <p:cNvPr id="47" name="Image 0" descr="figures/vectorized/fig2_cropped.png">    </p:cNvPr>
+          <p:cNvPr id="47" name="Image 0" descr="figures/vectorized/fig2_cropped.png"/>
           <p:cNvPicPr>
             <a:picLocks noChangeAspect="1"/>
           </p:cNvPicPr>
@@ -2645,7 +2645,7 @@
       </p:sp>
       <p:pic>
         <p:nvPicPr>
-          <p:cNvPr id="51" name="Image 1" descr="figures/vectorized/dwave_qpu_box.jpg">    </p:cNvPr>
+          <p:cNvPr id="51" name="Image 1" descr="figures/vectorized/dwave_qpu_box.jpg"/>
           <p:cNvPicPr>
             <a:picLocks noChangeAspect="1"/>
           </p:cNvPicPr>
@@ -2764,7 +2764,6 @@
                 </a:solidFill>
               </a:rPr>
               <a:t>• D-Wave Leap Hybrid BQM v2.2
-  9-second time limit
 </a:t>
             </a:r>
             <a:endParaRPr lang="en-US" sz="2200" dirty="0"/>
@@ -2795,8 +2794,7 @@
                   <a:srgbClr val="000000"/>
                 </a:solidFill>
               </a:rPr>
-              <a:t>• QAOA (Qiskit) — 2×2 only
-  p=2, 2048 shots, COBYLA
+              <a:t>• QAOA (Qiskit) — 2×2 only; circuit depth prohibitive at 4×4 scale — excluded from results (p=2, 2048 shots, COBYLA)
 </a:t>
             </a:r>
             <a:endParaRPr lang="en-US" sz="2200" dirty="0"/>
@@ -2934,7 +2932,7 @@
       </p:sp>
       <p:pic>
         <p:nvPicPr>
-          <p:cNvPr id="57" name="Image 2" descr="figures/vectorized/fig1_2puzzles.png">    </p:cNvPr>
+          <p:cNvPr id="57" name="Image 2" descr="figures/vectorized/fig1_2puzzles.png"/>
           <p:cNvPicPr>
             <a:picLocks noChangeAspect="1"/>
           </p:cNvPicPr>
@@ -3044,7 +3042,7 @@
       </p:sp>
       <p:pic>
         <p:nvPicPr>
-          <p:cNvPr id="61" name="Image 3" descr="figures/vectorized/fig3_cropped.png">    </p:cNvPr>
+          <p:cNvPr id="61" name="Image 3" descr="figures/vectorized/fig3_cropped.png"/>
           <p:cNvPicPr>
             <a:picLocks noChangeAspect="1"/>
           </p:cNvPicPr>
@@ -3146,7 +3144,7 @@
                   <a:srgbClr val="FFFFFF"/>
                 </a:solidFill>
               </a:rPr>
-              <a:t>RESULTS: D-WAVE QPU VS. SIMULATED ANNEALING</a:t>
+              <a:t>RESULTS: D-WAVE QPU VS. SIMULATED ANNEALING  (4×4 Sudoku)</a:t>
             </a:r>
             <a:endParaRPr lang="en-US" sz="2600" dirty="0"/>
           </a:p>
@@ -3154,7 +3152,7 @@
       </p:sp>
       <p:pic>
         <p:nvPicPr>
-          <p:cNvPr id="65" name="Image 4" descr="figures/vectorized/fig5_cropped.png">    </p:cNvPr>
+          <p:cNvPr id="65" name="Image 4" descr="figures/vectorized/fig5_cropped.png"/>
           <p:cNvPicPr>
             <a:picLocks noChangeAspect="1"/>
           </p:cNvPicPr>
@@ -3264,7 +3262,7 @@
       </p:sp>
       <p:pic>
         <p:nvPicPr>
-          <p:cNvPr id="69" name="Image 5" descr="figures/vectorized/fig4_qubo_matrix_hires-1.png">    </p:cNvPr>
+          <p:cNvPr id="69" name="Image 5" descr="figures/vectorized/fig4_qubo_matrix_hires-1.png"/>
           <p:cNvPicPr>
             <a:picLocks noChangeAspect="1"/>
           </p:cNvPicPr>
@@ -3438,7 +3436,7 @@
                   <a:srgbClr val="1A202C"/>
                 </a:solidFill>
               </a:rPr>
-              <a:t>SA degrades sharply with scale: 99% on blank 4×4 (64 vars) → 7% on 9×9 Easy (459 vars) — same constraint structure, 7× more variables, 14× lower success.</a:t>
+              <a:t>SA degrades sharply with scale: 99% on blank 4×4 (64 vars) → 7% on 9×9 Easy (459 vars, 30 givens) — 7× more variables, 14× lower success. Note: baselines differ (blank 4×4 vs. given-reduced 9×9); SA's collapse is likely understated on a fully blank 9×9.</a:t>
             </a:r>
             <a:endParaRPr lang="en-US" sz="1800" dirty="0"/>
           </a:p>
@@ -4191,7 +4189,7 @@
       </p:sp>
       <p:pic>
         <p:nvPicPr>
-          <p:cNvPr id="94" name="Image 6" descr="figures/vectorized/qr_code.png">    </p:cNvPr>
+          <p:cNvPr id="94" name="Image 6" descr="figures/vectorized/qr_code.png"/>
           <p:cNvPicPr>
             <a:picLocks noChangeAspect="1"/>
           </p:cNvPicPr>
@@ -4213,6 +4211,218 @@
           </a:prstGeom>
         </p:spPr>
       </p:pic>
+      <p:sp>
+        <p:nvSpPr>
+          <p:cNvPr id="95" name="QRLabel"/>
+          <p:cNvSpPr>
+            <a:spLocks noGrp="1"/>
+          </p:cNvSpPr>
+          <p:nvPr/>
+        </p:nvSpPr>
+        <p:spPr>
+          <a:xfrm>
+            <a:off x="36420320" y="31546800"/>
+            <a:ext cx="380000" cy="1280160"/>
+          </a:xfrm>
+          <a:prstGeom prst="rect">
+            <a:avLst/>
+          </a:prstGeom>
+          <a:noFill/>
+        </p:spPr>
+        <p:txBody>
+          <a:bodyPr wrap="square" anchor="ctr" lIns="0" rIns="0" tIns="0" bIns="0"/>
+          <a:lstStyle/>
+          <a:p>
+            <a:pPr algn="ctr">
+              <a:lnSpc>
+                <a:spcPts val="1000"/>
+              </a:lnSpc>
+              <a:spcBef>
+                <a:spcPts val="0"/>
+              </a:spcBef>
+              <a:spcAft>
+                <a:spcPts val="0"/>
+              </a:spcAft>
+            </a:pPr>
+            <a:r>
+              <a:rPr lang="en-US" sz="1300" b="1" dirty="0">
+                <a:solidFill>
+                  <a:srgbClr val="FFFFFF"/>
+                </a:solidFill>
+              </a:rPr>
+              <a:t>R</a:t>
+            </a:r>
+          </a:p>
+          <a:p>
+            <a:pPr algn="ctr">
+              <a:lnSpc>
+                <a:spcPts val="1000"/>
+              </a:lnSpc>
+              <a:spcBef>
+                <a:spcPts val="0"/>
+              </a:spcBef>
+              <a:spcAft>
+                <a:spcPts val="0"/>
+              </a:spcAft>
+            </a:pPr>
+            <a:r>
+              <a:rPr lang="en-US" sz="1300" b="1" dirty="0">
+                <a:solidFill>
+                  <a:srgbClr val="FFFFFF"/>
+                </a:solidFill>
+              </a:rPr>
+              <a:t>E</a:t>
+            </a:r>
+          </a:p>
+          <a:p>
+            <a:pPr algn="ctr">
+              <a:lnSpc>
+                <a:spcPts val="1000"/>
+              </a:lnSpc>
+              <a:spcBef>
+                <a:spcPts val="0"/>
+              </a:spcBef>
+              <a:spcAft>
+                <a:spcPts val="0"/>
+              </a:spcAft>
+            </a:pPr>
+            <a:r>
+              <a:rPr lang="en-US" sz="1300" b="1" dirty="0">
+                <a:solidFill>
+                  <a:srgbClr val="FFFFFF"/>
+                </a:solidFill>
+              </a:rPr>
+              <a:t>S</a:t>
+            </a:r>
+          </a:p>
+          <a:p>
+            <a:pPr algn="ctr">
+              <a:lnSpc>
+                <a:spcPts val="1000"/>
+              </a:lnSpc>
+              <a:spcBef>
+                <a:spcPts val="0"/>
+              </a:spcBef>
+              <a:spcAft>
+                <a:spcPts val="0"/>
+              </a:spcAft>
+            </a:pPr>
+            <a:r>
+              <a:rPr lang="en-US" sz="1300" b="1" dirty="0">
+                <a:solidFill>
+                  <a:srgbClr val="FFFFFF"/>
+                </a:solidFill>
+              </a:rPr>
+              <a:t>O</a:t>
+            </a:r>
+          </a:p>
+          <a:p>
+            <a:pPr algn="ctr">
+              <a:lnSpc>
+                <a:spcPts val="1000"/>
+              </a:lnSpc>
+              <a:spcBef>
+                <a:spcPts val="0"/>
+              </a:spcBef>
+              <a:spcAft>
+                <a:spcPts val="0"/>
+              </a:spcAft>
+            </a:pPr>
+            <a:r>
+              <a:rPr lang="en-US" sz="1300" b="1" dirty="0">
+                <a:solidFill>
+                  <a:srgbClr val="FFFFFF"/>
+                </a:solidFill>
+              </a:rPr>
+              <a:t>U</a:t>
+            </a:r>
+          </a:p>
+          <a:p>
+            <a:pPr algn="ctr">
+              <a:lnSpc>
+                <a:spcPts val="1000"/>
+              </a:lnSpc>
+              <a:spcBef>
+                <a:spcPts val="0"/>
+              </a:spcBef>
+              <a:spcAft>
+                <a:spcPts val="0"/>
+              </a:spcAft>
+            </a:pPr>
+            <a:r>
+              <a:rPr lang="en-US" sz="1300" b="1" dirty="0">
+                <a:solidFill>
+                  <a:srgbClr val="FFFFFF"/>
+                </a:solidFill>
+              </a:rPr>
+              <a:t>R</a:t>
+            </a:r>
+          </a:p>
+          <a:p>
+            <a:pPr algn="ctr">
+              <a:lnSpc>
+                <a:spcPts val="1000"/>
+              </a:lnSpc>
+              <a:spcBef>
+                <a:spcPts val="0"/>
+              </a:spcBef>
+              <a:spcAft>
+                <a:spcPts val="0"/>
+              </a:spcAft>
+            </a:pPr>
+            <a:r>
+              <a:rPr lang="en-US" sz="1300" b="1" dirty="0">
+                <a:solidFill>
+                  <a:srgbClr val="FFFFFF"/>
+                </a:solidFill>
+              </a:rPr>
+              <a:t>C</a:t>
+            </a:r>
+          </a:p>
+          <a:p>
+            <a:pPr algn="ctr">
+              <a:lnSpc>
+                <a:spcPts val="1000"/>
+              </a:lnSpc>
+              <a:spcBef>
+                <a:spcPts val="0"/>
+              </a:spcBef>
+              <a:spcAft>
+                <a:spcPts val="0"/>
+              </a:spcAft>
+            </a:pPr>
+            <a:r>
+              <a:rPr lang="en-US" sz="1300" b="1" dirty="0">
+                <a:solidFill>
+                  <a:srgbClr val="FFFFFF"/>
+                </a:solidFill>
+              </a:rPr>
+              <a:t>E</a:t>
+            </a:r>
+          </a:p>
+          <a:p>
+            <a:pPr algn="ctr">
+              <a:lnSpc>
+                <a:spcPts val="1000"/>
+              </a:lnSpc>
+              <a:spcBef>
+                <a:spcPts val="0"/>
+              </a:spcBef>
+              <a:spcAft>
+                <a:spcPts val="0"/>
+              </a:spcAft>
+            </a:pPr>
+            <a:r>
+              <a:rPr lang="en-US" sz="1300" b="1" dirty="0">
+                <a:solidFill>
+                  <a:srgbClr val="FFFFFF"/>
+                </a:solidFill>
+              </a:rPr>
+              <a:t>S</a:t>
+            </a:r>
+          </a:p>
+        </p:txBody>
+      </p:sp>
     </p:spTree>
   </p:cSld>
   <p:clrMapOvr>
